--- a/BCUCompSoc_PCAP_Sentinel_Workshop03.pptx
+++ b/BCUCompSoc_PCAP_Sentinel_Workshop03.pptx
@@ -4,18 +4,18 @@
   <p:sldMasterIdLst>
     <p:sldMasterId id="2147483648" r:id="rId1"/>
   </p:sldMasterIdLst>
+  <p:notesMasterIdLst>
+    <p:notesMasterId r:id="rId9"/>
+  </p:notesMasterIdLst>
   <p:sldIdLst>
     <p:sldId id="256" r:id="rId2"/>
     <p:sldId id="257" r:id="rId3"/>
     <p:sldId id="258" r:id="rId4"/>
     <p:sldId id="259" r:id="rId5"/>
     <p:sldId id="260" r:id="rId6"/>
-    <p:sldId id="261" r:id="rId12"/>
-    <p:sldId id="262" r:id="rId13"/>
+    <p:sldId id="261" r:id="rId7"/>
+    <p:sldId id="262" r:id="rId8"/>
   </p:sldIdLst>
-  <p:notesMasterIdLst>
-    <p:notesMasterId r:id="rId7"/>
-  </p:notesMasterIdLst>
   <p:sldSz cx="12192000" cy="6858000"/>
   <p:notesSz cx="6858000" cy="12192000"/>
   <p:defaultTextStyle>
@@ -113,25 +113,27 @@
   <p:extLst>
     <p:ext uri="{521415D9-36F7-43E2-AB2F-B90AF26B5E84}">
       <p14:sectionLst xmlns:p14="http://schemas.microsoft.com/office/powerpoint/2010/main">
-        <p14:section name="Introduction" id="{79ba52d4-dc45-5ad1-78e6-8fa953f70bd7}">
+        <p14:section name="Introduction" id="{79BA52D4-DC45-5AD1-78E6-8FA953F70BD7}">
           <p14:sldIdLst>
             <p14:sldId id="256"/>
           </p14:sldIdLst>
         </p14:section>
-        <p14:section name="Outcomes" id="{a18fc269-8cc7-5745-9153-0bece99aa704}">
+        <p14:section name="Outcomes" id="{A18FC269-8CC7-5745-9153-0BECE99AA704}">
           <p14:sldIdLst>
             <p14:sldId id="257"/>
           </p14:sldIdLst>
         </p14:section>
-        <p14:section name="Preparation" id="{9b1c7a2f-0bf8-b5b1-62ab-25fdc7aac3ae}">
+        <p14:section name="Preparation" id="{9B1C7A2F-0BF8-B5B1-62AB-25FDC7AAC3AE}">
           <p14:sldIdLst>
             <p14:sldId id="258"/>
             <p14:sldId id="259"/>
           </p14:sldIdLst>
         </p14:section>
-        <p14:section name="Build" id="{38895725-f300-d7c3-5287-83ffc1e66d91}">
+        <p14:section name="Build" id="{38895725-F300-D7C3-5287-83FFC1E66D91}">
           <p14:sldIdLst>
             <p14:sldId id="260"/>
+            <p14:sldId id="261"/>
+            <p14:sldId id="262"/>
           </p14:sldIdLst>
         </p14:section>
       </p14:sectionLst>
@@ -165,234 +167,10 @@
           <a:chExt cx="0" cy="0"/>
         </a:xfrm>
       </p:grpSpPr>
-      <p:sp>
-        <p:nvSpPr>
-          <p:cNvPr id="2" name="Header Placeholder 1"/>
-          <p:cNvSpPr>
-            <a:spLocks noGrp="1"/>
-          </p:cNvSpPr>
-          <p:nvPr>
-            <p:ph type="hdr" sz="quarter"/>
-          </p:nvPr>
-        </p:nvSpPr>
-        <p:spPr>
-          <a:xfrm>
-            <a:off x="0" y="0"/>
-            <a:ext cx="2971800" cy="458788"/>
-          </a:xfrm>
-          <a:prstGeom prst="rect">
-            <a:avLst/>
-          </a:prstGeom>
-        </p:spPr>
-        <p:txBody>
-          <a:bodyPr vert="horz" lIns="91440" tIns="45720" rIns="91440" bIns="45720" rtlCol="0"/>
-          <a:lstStyle>
-            <a:lvl1pPr algn="l">
-              <a:defRPr sz="1200"/>
-            </a:lvl1pPr>
-          </a:lstStyle>
-          <a:p>
-            <a:endParaRPr lang="en-US"/>
-          </a:p>
-        </p:txBody>
-      </p:sp>
-      <p:sp>
-        <p:nvSpPr>
-          <p:cNvPr id="3" name="Date Placeholder 2"/>
-          <p:cNvSpPr>
-            <a:spLocks noGrp="1"/>
-          </p:cNvSpPr>
-          <p:nvPr>
-            <p:ph type="dt" idx="1"/>
-          </p:nvPr>
-        </p:nvSpPr>
-        <p:spPr>
-          <a:xfrm>
-            <a:off x="3884613" y="0"/>
-            <a:ext cx="2971800" cy="458788"/>
-          </a:xfrm>
-          <a:prstGeom prst="rect">
-            <a:avLst/>
-          </a:prstGeom>
-        </p:spPr>
-        <p:txBody>
-          <a:bodyPr vert="horz" lIns="91440" tIns="45720" rIns="91440" bIns="45720" rtlCol="0"/>
-          <a:lstStyle>
-            <a:lvl1pPr algn="r">
-              <a:defRPr sz="1200"/>
-            </a:lvl1pPr>
-          </a:lstStyle>
-          <a:p>
-            <a:fld id="{5282F153-3F37-0F45-9E97-73ACFA13230C}" type="datetimeFigureOut">
-              <a:rPr lang="en-US"/>
-              <a:t>7/23/19</a:t>
-            </a:fld>
-            <a:endParaRPr lang="en-US"/>
-          </a:p>
-        </p:txBody>
-      </p:sp>
-      <p:sp>
-        <p:nvSpPr>
-          <p:cNvPr id="4" name="Slide Image Placeholder 3"/>
-          <p:cNvSpPr>
-            <a:spLocks noGrp="1" noRot="1" noChangeAspect="1"/>
-          </p:cNvSpPr>
-          <p:nvPr>
-            <p:ph type="sldImg" idx="2"/>
-          </p:nvPr>
-        </p:nvSpPr>
-        <p:spPr>
-          <a:xfrm>
-            <a:off x="685800" y="1143000"/>
-            <a:ext cx="5486400" cy="3086100"/>
-          </a:xfrm>
-          <a:prstGeom prst="rect">
-            <a:avLst/>
-          </a:prstGeom>
-          <a:noFill/>
-          <a:ln w="12700">
-            <a:solidFill>
-              <a:prstClr val="black"/>
-            </a:solidFill>
-          </a:ln>
-        </p:spPr>
-        <p:txBody>
-          <a:bodyPr vert="horz" lIns="91440" tIns="45720" rIns="91440" bIns="45720" rtlCol="0" anchor="ctr"/>
-          <a:lstStyle/>
-          <a:p>
-            <a:endParaRPr lang="en-US"/>
-          </a:p>
-        </p:txBody>
-      </p:sp>
-      <p:sp>
-        <p:nvSpPr>
-          <p:cNvPr id="5" name="Notes Placeholder 4"/>
-          <p:cNvSpPr>
-            <a:spLocks noGrp="1"/>
-          </p:cNvSpPr>
-          <p:nvPr>
-            <p:ph type="body" sz="quarter" idx="3"/>
-          </p:nvPr>
-        </p:nvSpPr>
-        <p:spPr>
-          <a:xfrm>
-            <a:off x="685800" y="4400550"/>
-            <a:ext cx="5486400" cy="3600450"/>
-          </a:xfrm>
-          <a:prstGeom prst="rect">
-            <a:avLst/>
-          </a:prstGeom>
-        </p:spPr>
-        <p:txBody>
-          <a:bodyPr vert="horz" lIns="91440" tIns="45720" rIns="91440" bIns="45720" rtlCol="0"/>
-          <a:lstStyle/>
-          <a:p>
-            <a:pPr lvl="0"/>
-            <a:r>
-              <a:rPr lang="en-US"/>
-              <a:t>Click to edit Master text styles</a:t>
-            </a:r>
-          </a:p>
-          <a:p>
-            <a:pPr lvl="1"/>
-            <a:r>
-              <a:rPr lang="en-US"/>
-              <a:t>Second level</a:t>
-            </a:r>
-          </a:p>
-          <a:p>
-            <a:pPr lvl="2"/>
-            <a:r>
-              <a:rPr lang="en-US"/>
-              <a:t>Third level</a:t>
-            </a:r>
-          </a:p>
-          <a:p>
-            <a:pPr lvl="3"/>
-            <a:r>
-              <a:rPr lang="en-US"/>
-              <a:t>Fourth level</a:t>
-            </a:r>
-          </a:p>
-          <a:p>
-            <a:pPr lvl="4"/>
-            <a:r>
-              <a:rPr lang="en-US"/>
-              <a:t>Fifth level</a:t>
-            </a:r>
-          </a:p>
-        </p:txBody>
-      </p:sp>
-      <p:sp>
-        <p:nvSpPr>
-          <p:cNvPr id="6" name="Footer Placeholder 5"/>
-          <p:cNvSpPr>
-            <a:spLocks noGrp="1"/>
-          </p:cNvSpPr>
-          <p:nvPr>
-            <p:ph type="ftr" sz="quarter" idx="4"/>
-          </p:nvPr>
-        </p:nvSpPr>
-        <p:spPr>
-          <a:xfrm>
-            <a:off x="0" y="8685213"/>
-            <a:ext cx="2971800" cy="458787"/>
-          </a:xfrm>
-          <a:prstGeom prst="rect">
-            <a:avLst/>
-          </a:prstGeom>
-        </p:spPr>
-        <p:txBody>
-          <a:bodyPr vert="horz" lIns="91440" tIns="45720" rIns="91440" bIns="45720" rtlCol="0" anchor="b"/>
-          <a:lstStyle>
-            <a:lvl1pPr algn="l">
-              <a:defRPr sz="1200"/>
-            </a:lvl1pPr>
-          </a:lstStyle>
-          <a:p>
-            <a:endParaRPr lang="en-US"/>
-          </a:p>
-        </p:txBody>
-      </p:sp>
-      <p:sp>
-        <p:nvSpPr>
-          <p:cNvPr id="7" name="Slide Number Placeholder 6"/>
-          <p:cNvSpPr>
-            <a:spLocks noGrp="1"/>
-          </p:cNvSpPr>
-          <p:nvPr>
-            <p:ph type="sldNum" sz="quarter" idx="5"/>
-          </p:nvPr>
-        </p:nvSpPr>
-        <p:spPr>
-          <a:xfrm>
-            <a:off x="3884613" y="8685213"/>
-            <a:ext cx="2971800" cy="458787"/>
-          </a:xfrm>
-          <a:prstGeom prst="rect">
-            <a:avLst/>
-          </a:prstGeom>
-        </p:spPr>
-        <p:txBody>
-          <a:bodyPr vert="horz" lIns="91440" tIns="45720" rIns="91440" bIns="45720" rtlCol="0" anchor="b"/>
-          <a:lstStyle>
-            <a:lvl1pPr algn="r">
-              <a:defRPr sz="1200"/>
-            </a:lvl1pPr>
-          </a:lstStyle>
-          <a:p>
-            <a:fld id="{CE5E9CC1-C706-0F49-92D6-E571CC5EEA8F}" type="slidenum">
-              <a:rPr lang="en-US"/>
-              <a:t>‹#›</a:t>
-            </a:fld>
-            <a:endParaRPr lang="en-US"/>
-          </a:p>
-        </p:txBody>
-      </p:sp>
     </p:spTree>
     <p:extLst>
       <p:ext uri="{BB962C8B-B14F-4D97-AF65-F5344CB8AC3E}">
-        <p14:creationId xmlns:p14="http://schemas.microsoft.com/office/powerpoint/2010/main" val="1024086991"/>
+        <p14:creationId xmlns:p14="http://schemas.microsoft.com/office/powerpoint/2010/main" val="428406647"/>
       </p:ext>
     </p:extLst>
   </p:cSld>
@@ -923,7 +701,7 @@
 </file>
 
 <file path=ppt/notesSlides/notesSlide6.xml><?xml version="1.0" encoding="utf-8"?>
-<p:notes xmlns:a="http://schemas.openxmlformats.org/drawingml/2006/main" xmlns:p="http://schemas.openxmlformats.org/presentationml/2006/main" xmlns:r="http://schemas.openxmlformats.org/officeDocument/2006/relationships">
+<p:notes xmlns:a="http://schemas.openxmlformats.org/drawingml/2006/main" xmlns:r="http://schemas.openxmlformats.org/officeDocument/2006/relationships" xmlns:p="http://schemas.openxmlformats.org/presentationml/2006/main">
   <p:cSld>
     <p:spTree>
       <p:nvGrpSpPr>
@@ -943,7 +721,7 @@
         <p:nvSpPr>
           <p:cNvPr id="2" name="Slide Image Placeholder 1"/>
           <p:cNvSpPr>
-            <a:spLocks noGrp="1"/>
+            <a:spLocks noGrp="1" noRot="1" noChangeAspect="1"/>
           </p:cNvSpPr>
           <p:nvPr>
             <p:ph type="sldImg" idx="2"/>
@@ -958,7 +736,7 @@
             <a:spLocks noGrp="1"/>
           </p:cNvSpPr>
           <p:nvPr>
-            <p:ph type="body" idx="3" sz="quarter"/>
+            <p:ph type="body" sz="quarter" idx="3"/>
           </p:nvPr>
         </p:nvSpPr>
         <p:spPr/>
@@ -979,7 +757,7 @@
             <a:spLocks noGrp="1"/>
           </p:cNvSpPr>
           <p:nvPr>
-            <p:ph type="sldNum" idx="5" sz="quarter"/>
+            <p:ph type="sldNum" sz="quarter" idx="5"/>
           </p:nvPr>
         </p:nvSpPr>
         <p:spPr/>
@@ -993,7 +771,7 @@
 </file>
 
 <file path=ppt/notesSlides/notesSlide7.xml><?xml version="1.0" encoding="utf-8"?>
-<p:notes xmlns:a="http://schemas.openxmlformats.org/drawingml/2006/main" xmlns:p="http://schemas.openxmlformats.org/presentationml/2006/main" xmlns:r="http://schemas.openxmlformats.org/officeDocument/2006/relationships">
+<p:notes xmlns:a="http://schemas.openxmlformats.org/drawingml/2006/main" xmlns:r="http://schemas.openxmlformats.org/officeDocument/2006/relationships" xmlns:p="http://schemas.openxmlformats.org/presentationml/2006/main">
   <p:cSld>
     <p:spTree>
       <p:nvGrpSpPr>
@@ -1013,7 +791,7 @@
         <p:nvSpPr>
           <p:cNvPr id="2" name="Slide Image Placeholder 1"/>
           <p:cNvSpPr>
-            <a:spLocks noGrp="1"/>
+            <a:spLocks noGrp="1" noRot="1" noChangeAspect="1"/>
           </p:cNvSpPr>
           <p:nvPr>
             <p:ph type="sldImg" idx="2"/>
@@ -1028,7 +806,7 @@
             <a:spLocks noGrp="1"/>
           </p:cNvSpPr>
           <p:nvPr>
-            <p:ph type="body" idx="3" sz="quarter"/>
+            <p:ph type="body" sz="quarter" idx="3"/>
           </p:nvPr>
         </p:nvSpPr>
         <p:spPr/>
@@ -1049,7 +827,7 @@
             <a:spLocks noGrp="1"/>
           </p:cNvSpPr>
           <p:nvPr>
-            <p:ph type="sldNum" idx="5" sz="quarter"/>
+            <p:ph type="sldNum" sz="quarter" idx="5"/>
           </p:nvPr>
         </p:nvSpPr>
         <p:spPr/>
@@ -1100,6 +878,7 @@
         <a:solidFill>
           <a:srgbClr val="0A1222"/>
         </a:solidFill>
+        <a:effectLst/>
       </p:bgPr>
     </p:bg>
     <p:spTree>
@@ -1118,14 +897,14 @@
       </p:grpSpPr>
       <p:pic>
         <p:nvPicPr>
-          <p:cNvPr id="2" name="Image 0" descr="/tmp/claude-0/-home-claude/9dae9694-6885-51b0-b2fa-cfe8a25a1d9c/scratchpad/deck/logo.png">    </p:cNvPr>
+          <p:cNvPr id="2" name="Image 0" descr="/tmp/claude-0/-home-claude/9dae9694-6885-51b0-b2fa-cfe8a25a1d9c/scratchpad/deck/logo.png"/>
           <p:cNvPicPr>
             <a:picLocks noChangeAspect="1"/>
           </p:cNvPicPr>
           <p:nvPr/>
         </p:nvPicPr>
         <p:blipFill>
-          <a:blip r:embed="rId1"/>
+          <a:blip r:embed="rId2"/>
           <a:stretch>
             <a:fillRect/>
           </a:stretch>
@@ -1156,6 +935,7 @@
         <a:solidFill>
           <a:srgbClr val="0A1222"/>
         </a:solidFill>
+        <a:effectLst/>
       </p:bgPr>
     </p:bg>
     <p:spTree>
@@ -1174,14 +954,14 @@
       </p:grpSpPr>
       <p:pic>
         <p:nvPicPr>
-          <p:cNvPr id="2" name="Image 0" descr="/tmp/claude-0/-home-claude/9dae9694-6885-51b0-b2fa-cfe8a25a1d9c/scratchpad/deck/logo.png">    </p:cNvPr>
+          <p:cNvPr id="2" name="Image 0" descr="/tmp/claude-0/-home-claude/9dae9694-6885-51b0-b2fa-cfe8a25a1d9c/scratchpad/deck/logo.png"/>
           <p:cNvPicPr>
             <a:picLocks noChangeAspect="1"/>
           </p:cNvPicPr>
           <p:nvPr/>
         </p:nvPicPr>
         <p:blipFill>
-          <a:blip r:embed="rId1"/>
+          <a:blip r:embed="rId2"/>
           <a:stretch>
             <a:fillRect/>
           </a:stretch>
@@ -1217,7 +997,7 @@
           <a:bodyPr wrap="square" lIns="0" tIns="0" rIns="0" bIns="0" rtlCol="0" anchor="ctr"/>
           <a:lstStyle/>
           <a:p>
-            <a:pPr indent="0" marL="0">
+            <a:pPr marL="0" indent="0">
               <a:buNone/>
             </a:pPr>
             <a:r>
@@ -1238,9 +1018,11 @@
       <p:sp>
         <p:nvSpPr>
           <p:cNvPr id="4" name="Text 1"/>
-          <p:cNvSpPr/>
+          <p:cNvSpPr>
+            <a:spLocks noGrp="1"/>
+          </p:cNvSpPr>
           <p:nvPr>
-            <p:ph idx="102" type="title" hasCustomPrompt="1"/>
+            <p:ph type="title" idx="102" hasCustomPrompt="1"/>
           </p:nvPr>
         </p:nvSpPr>
         <p:spPr>
@@ -1257,7 +1039,7 @@
         <p:txBody>
           <a:bodyPr wrap="square" rtlCol="0"/>
           <a:lstStyle>
-            <a:lvl1pPr algn="l" indent="0" marL="0">
+            <a:lvl1pPr marL="0" indent="0" algn="l">
               <a:buNone/>
               <a:defRPr lang="en-US" sz="3400" b="1" dirty="0">
                 <a:solidFill>
@@ -1270,7 +1052,7 @@
             </a:lvl1pPr>
           </a:lstStyle>
           <a:p>
-            <a:pPr algn="l" indent="0" marL="0">
+            <a:pPr marL="0" indent="0" algn="l">
               <a:buNone/>
             </a:pPr>
             <a:endParaRPr lang="en-US" sz="3400" dirty="0"/>
@@ -1297,7 +1079,7 @@
           </a:prstGeom>
           <a:extLst>
             <a:ext uri="{C572A759-6A51-4108-AA02-DFA0A04FC94B}">
-              <ma14:wrappingTextBoxFlag xmlns:ma14="http://schemas.microsoft.com/office/mac/drawingml/2011/main" val="0"/>
+              <ma14:wrappingTextBoxFlag xmlns:ma14="http://schemas.microsoft.com/office/mac/drawingml/2011/main" xmlns="" val="0"/>
             </a:ext>
           </a:extLst>
         </p:spPr>
@@ -1318,8 +1100,8 @@
           <a:p>
             <a:pPr algn="r"/>
             <a:fld id="{F7021451-1387-4CA6-816F-3879F97B5CBC}" type="slidenum">
-              <a:rPr b="0" lang="en-US"/>
-              <a:t>1003</a:t>
+              <a:rPr lang="en-US" b="0"/>
+              <a:t>‹#›</a:t>
             </a:fld>
             <a:endParaRPr lang="en-US"/>
           </a:p>
@@ -1336,6 +1118,11 @@
 <file path=ppt/slideMasters/slideMaster1.xml><?xml version="1.0" encoding="utf-8"?>
 <p:sldMaster xmlns:a="http://schemas.openxmlformats.org/drawingml/2006/main" xmlns:r="http://schemas.openxmlformats.org/officeDocument/2006/relationships" xmlns:p="http://schemas.openxmlformats.org/presentationml/2006/main">
   <p:cSld>
+    <p:bg>
+      <p:bgRef idx="1001">
+        <a:schemeClr val="bg1"/>
+      </p:bgRef>
+    </p:bg>
     <p:spTree>
       <p:nvGrpSpPr>
         <p:cNvPr id="1" name=""/>
@@ -1370,7 +1157,7 @@
           </a:prstGeom>
           <a:extLst>
             <a:ext uri="{C572A759-6A51-4108-AA02-DFA0A04FC94B}">
-              <ma14:wrappingTextBoxFlag xmlns:ma14="http://schemas.microsoft.com/office/mac/drawingml/2011/main" val="0"/>
+              <ma14:wrappingTextBoxFlag xmlns:ma14="http://schemas.microsoft.com/office/mac/drawingml/2011/main" xmlns="" val="0"/>
             </a:ext>
           </a:extLst>
         </p:spPr>
@@ -1391,8 +1178,8 @@
           <a:p>
             <a:pPr algn="r"/>
             <a:fld id="{F7021451-1387-4CA6-816F-3879F97B5CBC}" type="slidenum">
-              <a:rPr b="0" lang="en-US"/>
-              <a:t>null</a:t>
+              <a:rPr lang="en-US" b="0"/>
+              <a:t>‹#›</a:t>
             </a:fld>
             <a:endParaRPr lang="en-US"/>
           </a:p>
@@ -1698,7 +1485,7 @@
           <a:bodyPr wrap="square" lIns="0" tIns="0" rIns="0" bIns="0" rtlCol="0" anchor="t"/>
           <a:lstStyle/>
           <a:p>
-            <a:pPr indent="0" marL="0">
+            <a:pPr marL="0" indent="0">
               <a:buNone/>
             </a:pPr>
             <a:r>
@@ -1737,7 +1524,7 @@
           <a:bodyPr wrap="square" lIns="0" tIns="0" rIns="0" bIns="0" rtlCol="0" anchor="t"/>
           <a:lstStyle/>
           <a:p>
-            <a:pPr indent="0" marL="0">
+            <a:pPr marL="0" indent="0">
               <a:buNone/>
             </a:pPr>
             <a:r>
@@ -1773,7 +1560,7 @@
           <a:bodyPr wrap="square" lIns="0" tIns="0" rIns="0" bIns="0" rtlCol="0" anchor="t"/>
           <a:lstStyle/>
           <a:p>
-            <a:pPr indent="0" marL="0">
+            <a:pPr marL="0" indent="0">
               <a:buNone/>
             </a:pPr>
             <a:r>
@@ -1814,6 +1601,13 @@
             <a:prstDash val="solid"/>
           </a:ln>
         </p:spPr>
+        <p:txBody>
+          <a:bodyPr/>
+          <a:lstStyle/>
+          <a:p>
+            <a:endParaRPr lang="en-GB"/>
+          </a:p>
+        </p:txBody>
       </p:sp>
       <p:sp>
         <p:nvSpPr>
@@ -1836,7 +1630,7 @@
           <a:bodyPr wrap="square" lIns="0" tIns="0" rIns="0" bIns="0" rtlCol="0" anchor="t"/>
           <a:lstStyle/>
           <a:p>
-            <a:pPr indent="0" marL="0">
+            <a:pPr marL="0" indent="0">
               <a:buNone/>
             </a:pPr>
             <a:r>
@@ -1875,7 +1669,7 @@
           <a:bodyPr wrap="square" lIns="0" tIns="0" rIns="0" bIns="0" rtlCol="0" anchor="t"/>
           <a:lstStyle/>
           <a:p>
-            <a:pPr indent="0" marL="0">
+            <a:pPr marL="0" indent="0">
               <a:buNone/>
             </a:pPr>
             <a:r>
@@ -1884,7 +1678,15 @@
                   <a:schemeClr val="bg1"/>
                 </a:solidFill>
               </a:rPr>
-              <a:t>Daeron W  ·  BCUSCA</a:t>
+              <a:t>Daeron W  ·  </a:t>
+            </a:r>
+            <a:r>
+              <a:rPr lang="en-US" sz="2200" b="1" dirty="0" err="1">
+                <a:solidFill>
+                  <a:schemeClr val="bg1"/>
+                </a:solidFill>
+              </a:rPr>
+              <a:t>BCUCompSoc</a:t>
             </a:r>
             <a:endParaRPr lang="en-US" sz="2200" dirty="0"/>
           </a:p>
@@ -1916,6 +1718,13 @@
             <a:prstDash val="solid"/>
           </a:ln>
         </p:spPr>
+        <p:txBody>
+          <a:bodyPr/>
+          <a:lstStyle/>
+          <a:p>
+            <a:endParaRPr lang="en-GB"/>
+          </a:p>
+        </p:txBody>
       </p:sp>
       <p:sp>
         <p:nvSpPr>
@@ -1938,7 +1747,7 @@
           <a:bodyPr wrap="square" lIns="0" tIns="0" rIns="0" bIns="0" rtlCol="0" anchor="ctr"/>
           <a:lstStyle/>
           <a:p>
-            <a:pPr algn="ctr" indent="0" marL="0">
+            <a:pPr marL="0" indent="0" algn="ctr">
               <a:buNone/>
             </a:pPr>
             <a:r>
@@ -1977,17 +1786,24 @@
             <a:prstDash val="solid"/>
           </a:ln>
         </p:spPr>
+        <p:txBody>
+          <a:bodyPr/>
+          <a:lstStyle/>
+          <a:p>
+            <a:endParaRPr lang="en-GB"/>
+          </a:p>
+        </p:txBody>
       </p:sp>
       <p:pic>
         <p:nvPicPr>
-          <p:cNvPr id="11" name="Image 0" descr="preencoded.png">    </p:cNvPr>
+          <p:cNvPr id="11" name="Image 0" descr="preencoded.png"/>
           <p:cNvPicPr>
             <a:picLocks noChangeAspect="1"/>
           </p:cNvPicPr>
           <p:nvPr/>
         </p:nvPicPr>
         <p:blipFill>
-          <a:blip r:embed="rId1"/>
+          <a:blip r:embed="rId3"/>
           <a:stretch>
             <a:fillRect/>
           </a:stretch>
@@ -2023,7 +1839,7 @@
           <a:bodyPr wrap="square" lIns="0" tIns="0" rIns="0" bIns="0" rtlCol="0" anchor="t"/>
           <a:lstStyle/>
           <a:p>
-            <a:pPr indent="0" marL="0">
+            <a:pPr marL="0" indent="0">
               <a:buNone/>
             </a:pPr>
             <a:r>
@@ -2059,7 +1875,7 @@
           <a:bodyPr wrap="square" lIns="0" tIns="0" rIns="0" bIns="0" rtlCol="0" anchor="t"/>
           <a:lstStyle/>
           <a:p>
-            <a:pPr indent="0" marL="0">
+            <a:pPr marL="0" indent="0">
               <a:buNone/>
             </a:pPr>
             <a:r>
@@ -2097,6 +1913,13 @@
             <a:tailEnd type="triangle"/>
           </a:ln>
         </p:spPr>
+        <p:txBody>
+          <a:bodyPr/>
+          <a:lstStyle/>
+          <a:p>
+            <a:endParaRPr lang="en-GB"/>
+          </a:p>
+        </p:txBody>
       </p:sp>
       <p:sp>
         <p:nvSpPr>
@@ -2122,17 +1945,24 @@
             <a:prstDash val="solid"/>
           </a:ln>
         </p:spPr>
+        <p:txBody>
+          <a:bodyPr/>
+          <a:lstStyle/>
+          <a:p>
+            <a:endParaRPr lang="en-GB"/>
+          </a:p>
+        </p:txBody>
       </p:sp>
       <p:pic>
         <p:nvPicPr>
-          <p:cNvPr id="16" name="Image 1" descr="preencoded.png">    </p:cNvPr>
+          <p:cNvPr id="16" name="Image 1" descr="preencoded.png"/>
           <p:cNvPicPr>
             <a:picLocks noChangeAspect="1"/>
           </p:cNvPicPr>
           <p:nvPr/>
         </p:nvPicPr>
         <p:blipFill>
-          <a:blip r:embed="rId2"/>
+          <a:blip r:embed="rId4"/>
           <a:stretch>
             <a:fillRect/>
           </a:stretch>
@@ -2168,7 +1998,7 @@
           <a:bodyPr wrap="square" lIns="0" tIns="0" rIns="0" bIns="0" rtlCol="0" anchor="t"/>
           <a:lstStyle/>
           <a:p>
-            <a:pPr indent="0" marL="0">
+            <a:pPr marL="0" indent="0">
               <a:buNone/>
             </a:pPr>
             <a:r>
@@ -2204,7 +2034,7 @@
           <a:bodyPr wrap="square" lIns="0" tIns="0" rIns="0" bIns="0" rtlCol="0" anchor="t"/>
           <a:lstStyle/>
           <a:p>
-            <a:pPr indent="0" marL="0">
+            <a:pPr marL="0" indent="0">
               <a:buNone/>
             </a:pPr>
             <a:r>
@@ -2242,6 +2072,13 @@
             <a:tailEnd type="triangle"/>
           </a:ln>
         </p:spPr>
+        <p:txBody>
+          <a:bodyPr/>
+          <a:lstStyle/>
+          <a:p>
+            <a:endParaRPr lang="en-GB"/>
+          </a:p>
+        </p:txBody>
       </p:sp>
       <p:sp>
         <p:nvSpPr>
@@ -2267,17 +2104,24 @@
             <a:prstDash val="solid"/>
           </a:ln>
         </p:spPr>
+        <p:txBody>
+          <a:bodyPr/>
+          <a:lstStyle/>
+          <a:p>
+            <a:endParaRPr lang="en-GB"/>
+          </a:p>
+        </p:txBody>
       </p:sp>
       <p:pic>
         <p:nvPicPr>
-          <p:cNvPr id="21" name="Image 2" descr="preencoded.png">    </p:cNvPr>
+          <p:cNvPr id="21" name="Image 2" descr="preencoded.png"/>
           <p:cNvPicPr>
             <a:picLocks noChangeAspect="1"/>
           </p:cNvPicPr>
           <p:nvPr/>
         </p:nvPicPr>
         <p:blipFill>
-          <a:blip r:embed="rId3"/>
+          <a:blip r:embed="rId5"/>
           <a:stretch>
             <a:fillRect/>
           </a:stretch>
@@ -2313,7 +2157,7 @@
           <a:bodyPr wrap="square" lIns="0" tIns="0" rIns="0" bIns="0" rtlCol="0" anchor="t"/>
           <a:lstStyle/>
           <a:p>
-            <a:pPr indent="0" marL="0">
+            <a:pPr marL="0" indent="0">
               <a:buNone/>
             </a:pPr>
             <a:r>
@@ -2349,7 +2193,7 @@
           <a:bodyPr wrap="square" lIns="0" tIns="0" rIns="0" bIns="0" rtlCol="0" anchor="t"/>
           <a:lstStyle/>
           <a:p>
-            <a:pPr indent="0" marL="0">
+            <a:pPr marL="0" indent="0">
               <a:buNone/>
             </a:pPr>
             <a:r>
@@ -2392,9 +2236,11 @@
       <p:sp>
         <p:nvSpPr>
           <p:cNvPr id="3" name="Text 1"/>
-          <p:cNvSpPr/>
+          <p:cNvSpPr>
+            <a:spLocks noGrp="1"/>
+          </p:cNvSpPr>
           <p:nvPr>
-            <p:ph idx="102" type="title" hasCustomPrompt="1"/>
+            <p:ph type="title" idx="102" hasCustomPrompt="1"/>
           </p:nvPr>
         </p:nvSpPr>
         <p:spPr>
@@ -2412,7 +2258,7 @@
           <a:bodyPr wrap="square" lIns="0" tIns="0" rIns="0" bIns="0" rtlCol="0" anchor="ctr"/>
           <a:lstStyle/>
           <a:p>
-            <a:pPr algn="l" indent="0" marL="0">
+            <a:pPr marL="0" indent="0" algn="l">
               <a:buNone/>
             </a:pPr>
             <a:r>
@@ -2450,7 +2296,7 @@
           </a:prstGeom>
           <a:extLst>
             <a:ext uri="{C572A759-6A51-4108-AA02-DFA0A04FC94B}">
-              <ma14:wrappingTextBoxFlag xmlns:ma14="http://schemas.microsoft.com/office/mac/drawingml/2011/main" val="0"/>
+              <ma14:wrappingTextBoxFlag xmlns:ma14="http://schemas.microsoft.com/office/mac/drawingml/2011/main" xmlns="" val="0"/>
             </a:ext>
           </a:extLst>
         </p:spPr>
@@ -2471,7 +2317,7 @@
           <a:p>
             <a:pPr algn="r"/>
             <a:fld id="{F7021451-1387-4CA6-816F-3879F97B5CBC}" type="slidenum">
-              <a:rPr b="0" lang="en-US"/>
+              <a:rPr lang="en-US" b="0"/>
               <a:t>2</a:t>
             </a:fld>
             <a:endParaRPr lang="en-US"/>
@@ -2495,7 +2341,7 @@
           <a:noFill/>
         </p:spPr>
         <p:txBody>
-          <a:bodyPr wrap="square" lIns="0" rIns="0" tIns="0" bIns="0" anchor="ctr">
+          <a:bodyPr wrap="square" lIns="0" tIns="0" rIns="0" bIns="0" anchor="ctr">
             <a:spAutoFit/>
           </a:bodyPr>
           <a:lstStyle/>
@@ -2555,7 +2401,9 @@
         <p:txBody>
           <a:bodyPr rtlCol="0" anchor="ctr"/>
           <a:lstStyle/>
-          <a:p/>
+          <a:p>
+            <a:endParaRPr/>
+          </a:p>
         </p:txBody>
       </p:sp>
       <p:pic>
@@ -2567,7 +2415,7 @@
           <p:nvPr/>
         </p:nvPicPr>
         <p:blipFill>
-          <a:blip r:embed="rId1"/>
+          <a:blip r:embed="rId3"/>
           <a:stretch>
             <a:fillRect/>
           </a:stretch>
@@ -2599,7 +2447,7 @@
           <a:noFill/>
         </p:spPr>
         <p:txBody>
-          <a:bodyPr wrap="square" lIns="0" rIns="0" tIns="0" bIns="0" anchor="ctr">
+          <a:bodyPr wrap="square" lIns="0" tIns="0" rIns="0" bIns="0" anchor="ctr">
             <a:spAutoFit/>
           </a:bodyPr>
           <a:lstStyle/>
@@ -2633,7 +2481,7 @@
           <a:noFill/>
         </p:spPr>
         <p:txBody>
-          <a:bodyPr wrap="square" lIns="0" rIns="0" tIns="0" bIns="0" anchor="t">
+          <a:bodyPr wrap="square" lIns="0" tIns="0" rIns="0" bIns="0" anchor="t">
             <a:spAutoFit/>
           </a:bodyPr>
           <a:lstStyle/>
@@ -2715,7 +2563,9 @@
         <p:txBody>
           <a:bodyPr rtlCol="0" anchor="ctr"/>
           <a:lstStyle/>
-          <a:p/>
+          <a:p>
+            <a:endParaRPr/>
+          </a:p>
         </p:txBody>
       </p:sp>
       <p:pic>
@@ -2727,7 +2577,7 @@
           <p:nvPr/>
         </p:nvPicPr>
         <p:blipFill>
-          <a:blip r:embed="rId9"/>
+          <a:blip r:embed="rId4"/>
           <a:stretch>
             <a:fillRect/>
           </a:stretch>
@@ -2759,7 +2609,7 @@
           <a:noFill/>
         </p:spPr>
         <p:txBody>
-          <a:bodyPr wrap="square" lIns="0" rIns="0" tIns="0" bIns="0" anchor="ctr">
+          <a:bodyPr wrap="square" lIns="0" tIns="0" rIns="0" bIns="0" anchor="ctr">
             <a:spAutoFit/>
           </a:bodyPr>
           <a:lstStyle/>
@@ -2793,7 +2643,7 @@
           <a:noFill/>
         </p:spPr>
         <p:txBody>
-          <a:bodyPr wrap="square" lIns="0" rIns="0" tIns="0" bIns="0" anchor="t">
+          <a:bodyPr wrap="square" lIns="0" tIns="0" rIns="0" bIns="0" anchor="t">
             <a:spAutoFit/>
           </a:bodyPr>
           <a:lstStyle/>
@@ -2849,7 +2699,7 @@
           <a:noFill/>
         </p:spPr>
         <p:txBody>
-          <a:bodyPr wrap="square" lIns="0" rIns="0" tIns="0" bIns="0" anchor="t">
+          <a:bodyPr wrap="square" lIns="0" tIns="0" rIns="0" bIns="0" anchor="t">
             <a:spAutoFit/>
           </a:bodyPr>
           <a:lstStyle/>
@@ -2908,7 +2758,9 @@
         <p:txBody>
           <a:bodyPr rtlCol="0" anchor="ctr"/>
           <a:lstStyle/>
-          <a:p/>
+          <a:p>
+            <a:endParaRPr/>
+          </a:p>
         </p:txBody>
       </p:sp>
       <p:sp>
@@ -2928,7 +2780,7 @@
           <a:noFill/>
         </p:spPr>
         <p:txBody>
-          <a:bodyPr wrap="square" lIns="0" rIns="0" tIns="0" bIns="0" anchor="ctr">
+          <a:bodyPr wrap="square" lIns="0" tIns="0" rIns="0" bIns="0" anchor="ctr">
             <a:spAutoFit/>
           </a:bodyPr>
           <a:lstStyle/>
@@ -2962,7 +2814,7 @@
           <a:noFill/>
         </p:spPr>
         <p:txBody>
-          <a:bodyPr wrap="square" lIns="0" rIns="0" tIns="0" bIns="0" anchor="ctr">
+          <a:bodyPr wrap="square" lIns="0" tIns="0" rIns="0" bIns="0" anchor="ctr">
             <a:spAutoFit/>
           </a:bodyPr>
           <a:lstStyle/>
@@ -3021,7 +2873,9 @@
         <p:txBody>
           <a:bodyPr rtlCol="0" anchor="ctr"/>
           <a:lstStyle/>
-          <a:p/>
+          <a:p>
+            <a:endParaRPr/>
+          </a:p>
         </p:txBody>
       </p:sp>
       <p:sp>
@@ -3041,7 +2895,7 @@
           <a:noFill/>
         </p:spPr>
         <p:txBody>
-          <a:bodyPr wrap="square" lIns="0" rIns="0" tIns="0" bIns="0" anchor="ctr">
+          <a:bodyPr wrap="square" lIns="0" tIns="0" rIns="0" bIns="0" anchor="ctr">
             <a:spAutoFit/>
           </a:bodyPr>
           <a:lstStyle/>
@@ -3075,7 +2929,7 @@
           <a:noFill/>
         </p:spPr>
         <p:txBody>
-          <a:bodyPr wrap="square" lIns="0" rIns="0" tIns="0" bIns="0" anchor="ctr">
+          <a:bodyPr wrap="square" lIns="0" tIns="0" rIns="0" bIns="0" anchor="ctr">
             <a:spAutoFit/>
           </a:bodyPr>
           <a:lstStyle/>
@@ -3134,7 +2988,9 @@
         <p:txBody>
           <a:bodyPr rtlCol="0" anchor="ctr"/>
           <a:lstStyle/>
-          <a:p/>
+          <a:p>
+            <a:endParaRPr/>
+          </a:p>
         </p:txBody>
       </p:sp>
       <p:sp>
@@ -3154,7 +3010,7 @@
           <a:noFill/>
         </p:spPr>
         <p:txBody>
-          <a:bodyPr wrap="square" lIns="0" rIns="0" tIns="0" bIns="0" anchor="ctr">
+          <a:bodyPr wrap="square" lIns="0" tIns="0" rIns="0" bIns="0" anchor="ctr">
             <a:spAutoFit/>
           </a:bodyPr>
           <a:lstStyle/>
@@ -3188,7 +3044,7 @@
           <a:noFill/>
         </p:spPr>
         <p:txBody>
-          <a:bodyPr wrap="square" lIns="0" rIns="0" tIns="0" bIns="0" anchor="ctr">
+          <a:bodyPr wrap="square" lIns="0" tIns="0" rIns="0" bIns="0" anchor="ctr">
             <a:spAutoFit/>
           </a:bodyPr>
           <a:lstStyle/>
@@ -3247,7 +3103,9 @@
         <p:txBody>
           <a:bodyPr rtlCol="0" anchor="ctr"/>
           <a:lstStyle/>
-          <a:p/>
+          <a:p>
+            <a:endParaRPr/>
+          </a:p>
         </p:txBody>
       </p:sp>
       <p:sp>
@@ -3267,7 +3125,7 @@
           <a:noFill/>
         </p:spPr>
         <p:txBody>
-          <a:bodyPr wrap="square" lIns="0" rIns="0" tIns="0" bIns="0" anchor="ctr">
+          <a:bodyPr wrap="square" lIns="0" tIns="0" rIns="0" bIns="0" anchor="ctr">
             <a:spAutoFit/>
           </a:bodyPr>
           <a:lstStyle/>
@@ -3301,7 +3159,7 @@
           <a:noFill/>
         </p:spPr>
         <p:txBody>
-          <a:bodyPr wrap="square" lIns="0" rIns="0" tIns="0" bIns="0" anchor="ctr">
+          <a:bodyPr wrap="square" lIns="0" tIns="0" rIns="0" bIns="0" anchor="ctr">
             <a:spAutoFit/>
           </a:bodyPr>
           <a:lstStyle/>
@@ -3345,9 +3203,11 @@
       <p:sp>
         <p:nvSpPr>
           <p:cNvPr id="3" name="Text 1"/>
-          <p:cNvSpPr/>
+          <p:cNvSpPr>
+            <a:spLocks noGrp="1"/>
+          </p:cNvSpPr>
           <p:nvPr>
-            <p:ph idx="102" type="title" hasCustomPrompt="1"/>
+            <p:ph type="title" idx="102" hasCustomPrompt="1"/>
           </p:nvPr>
         </p:nvSpPr>
         <p:spPr>
@@ -3365,7 +3225,7 @@
           <a:bodyPr wrap="square" lIns="0" tIns="0" rIns="0" bIns="0" rtlCol="0" anchor="ctr"/>
           <a:lstStyle/>
           <a:p>
-            <a:pPr algn="l" indent="0" marL="0">
+            <a:pPr marL="0" indent="0" algn="l">
               <a:buNone/>
             </a:pPr>
             <a:r>
@@ -3403,7 +3263,7 @@
           </a:prstGeom>
           <a:extLst>
             <a:ext uri="{C572A759-6A51-4108-AA02-DFA0A04FC94B}">
-              <ma14:wrappingTextBoxFlag xmlns:ma14="http://schemas.microsoft.com/office/mac/drawingml/2011/main" val="0"/>
+              <ma14:wrappingTextBoxFlag xmlns:ma14="http://schemas.microsoft.com/office/mac/drawingml/2011/main" xmlns="" val="0"/>
             </a:ext>
           </a:extLst>
         </p:spPr>
@@ -3424,7 +3284,7 @@
           <a:p>
             <a:pPr algn="r"/>
             <a:fld id="{F7021451-1387-4CA6-816F-3879F97B5CBC}" type="slidenum">
-              <a:rPr b="0" lang="en-US"/>
+              <a:rPr lang="en-US" b="0"/>
               <a:t>3</a:t>
             </a:fld>
             <a:endParaRPr lang="en-US"/>
@@ -3448,7 +3308,7 @@
           <a:noFill/>
         </p:spPr>
         <p:txBody>
-          <a:bodyPr wrap="square" lIns="0" rIns="0" tIns="0" bIns="0" anchor="ctr">
+          <a:bodyPr wrap="square" lIns="0" tIns="0" rIns="0" bIns="0" anchor="ctr">
             <a:spAutoFit/>
           </a:bodyPr>
           <a:lstStyle/>
@@ -3508,7 +3368,9 @@
         <p:txBody>
           <a:bodyPr rtlCol="0" anchor="ctr"/>
           <a:lstStyle/>
-          <a:p/>
+          <a:p>
+            <a:endParaRPr/>
+          </a:p>
         </p:txBody>
       </p:sp>
       <p:sp>
@@ -3528,7 +3390,7 @@
           <a:noFill/>
         </p:spPr>
         <p:txBody>
-          <a:bodyPr wrap="square" lIns="0" rIns="0" tIns="0" bIns="0" anchor="t">
+          <a:bodyPr wrap="square" lIns="0" tIns="0" rIns="0" bIns="0" anchor="t">
             <a:spAutoFit/>
           </a:bodyPr>
           <a:lstStyle/>
@@ -3554,7 +3416,7 @@
           <p:nvPr/>
         </p:nvPicPr>
         <p:blipFill>
-          <a:blip r:embed="rId1"/>
+          <a:blip r:embed="rId3"/>
           <a:stretch>
             <a:fillRect/>
           </a:stretch>
@@ -3586,7 +3448,7 @@
           <a:noFill/>
         </p:spPr>
         <p:txBody>
-          <a:bodyPr wrap="square" lIns="0" rIns="0" tIns="0" bIns="0" anchor="ctr">
+          <a:bodyPr wrap="square" lIns="0" tIns="0" rIns="0" bIns="0" anchor="ctr">
             <a:spAutoFit/>
           </a:bodyPr>
           <a:lstStyle/>
@@ -3619,7 +3481,7 @@
           <a:noFill/>
         </p:spPr>
         <p:txBody>
-          <a:bodyPr wrap="square" lIns="0" rIns="0" tIns="0" bIns="0" anchor="t">
+          <a:bodyPr wrap="square" lIns="0" tIns="0" rIns="0" bIns="0" anchor="t">
             <a:spAutoFit/>
           </a:bodyPr>
           <a:lstStyle/>
@@ -3724,7 +3586,9 @@
         <p:txBody>
           <a:bodyPr rtlCol="0" anchor="ctr"/>
           <a:lstStyle/>
-          <a:p/>
+          <a:p>
+            <a:endParaRPr/>
+          </a:p>
         </p:txBody>
       </p:sp>
       <p:sp>
@@ -3744,7 +3608,7 @@
           <a:noFill/>
         </p:spPr>
         <p:txBody>
-          <a:bodyPr wrap="square" lIns="0" rIns="0" tIns="0" bIns="0" anchor="t">
+          <a:bodyPr wrap="square" lIns="0" tIns="0" rIns="0" bIns="0" anchor="t">
             <a:spAutoFit/>
           </a:bodyPr>
           <a:lstStyle/>
@@ -3770,7 +3634,7 @@
           <p:nvPr/>
         </p:nvPicPr>
         <p:blipFill>
-          <a:blip r:embed="rId8"/>
+          <a:blip r:embed="rId4"/>
           <a:stretch>
             <a:fillRect/>
           </a:stretch>
@@ -3802,7 +3666,7 @@
           <a:noFill/>
         </p:spPr>
         <p:txBody>
-          <a:bodyPr wrap="square" lIns="0" rIns="0" tIns="0" bIns="0" anchor="ctr">
+          <a:bodyPr wrap="square" lIns="0" tIns="0" rIns="0" bIns="0" anchor="ctr">
             <a:spAutoFit/>
           </a:bodyPr>
           <a:lstStyle/>
@@ -3835,7 +3699,7 @@
           <a:noFill/>
         </p:spPr>
         <p:txBody>
-          <a:bodyPr wrap="square" lIns="0" rIns="0" tIns="0" bIns="0" anchor="t">
+          <a:bodyPr wrap="square" lIns="0" tIns="0" rIns="0" bIns="0" anchor="t">
             <a:spAutoFit/>
           </a:bodyPr>
           <a:lstStyle/>
@@ -3996,7 +3860,9 @@
         <p:txBody>
           <a:bodyPr rtlCol="0" anchor="ctr"/>
           <a:lstStyle/>
-          <a:p/>
+          <a:p>
+            <a:endParaRPr/>
+          </a:p>
         </p:txBody>
       </p:sp>
       <p:sp>
@@ -4016,7 +3882,7 @@
           <a:noFill/>
         </p:spPr>
         <p:txBody>
-          <a:bodyPr wrap="square" lIns="0" rIns="0" tIns="0" bIns="0" anchor="t">
+          <a:bodyPr wrap="square" lIns="0" tIns="0" rIns="0" bIns="0" anchor="t">
             <a:spAutoFit/>
           </a:bodyPr>
           <a:lstStyle/>
@@ -4042,7 +3908,7 @@
           <p:nvPr/>
         </p:nvPicPr>
         <p:blipFill>
-          <a:blip r:embed="rId9"/>
+          <a:blip r:embed="rId5"/>
           <a:stretch>
             <a:fillRect/>
           </a:stretch>
@@ -4074,7 +3940,7 @@
           <a:noFill/>
         </p:spPr>
         <p:txBody>
-          <a:bodyPr wrap="square" lIns="0" rIns="0" tIns="0" bIns="0" anchor="ctr">
+          <a:bodyPr wrap="square" lIns="0" tIns="0" rIns="0" bIns="0" anchor="ctr">
             <a:spAutoFit/>
           </a:bodyPr>
           <a:lstStyle/>
@@ -4107,7 +3973,7 @@
           <a:noFill/>
         </p:spPr>
         <p:txBody>
-          <a:bodyPr wrap="square" lIns="0" rIns="0" tIns="0" bIns="0" anchor="t">
+          <a:bodyPr wrap="square" lIns="0" tIns="0" rIns="0" bIns="0" anchor="t">
             <a:spAutoFit/>
           </a:bodyPr>
           <a:lstStyle/>
@@ -4258,7 +4124,9 @@
         <p:txBody>
           <a:bodyPr rtlCol="0" anchor="ctr"/>
           <a:lstStyle/>
-          <a:p/>
+          <a:p>
+            <a:endParaRPr/>
+          </a:p>
         </p:txBody>
       </p:sp>
       <p:pic>
@@ -4270,7 +4138,7 @@
           <p:nvPr/>
         </p:nvPicPr>
         <p:blipFill>
-          <a:blip r:embed="rId10"/>
+          <a:blip r:embed="rId6"/>
           <a:stretch>
             <a:fillRect/>
           </a:stretch>
@@ -4302,7 +4170,7 @@
           <a:noFill/>
         </p:spPr>
         <p:txBody>
-          <a:bodyPr wrap="square" lIns="0" rIns="0" tIns="0" bIns="0" anchor="ctr">
+          <a:bodyPr wrap="square" lIns="0" tIns="0" rIns="0" bIns="0" anchor="ctr">
             <a:spAutoFit/>
           </a:bodyPr>
           <a:lstStyle/>
@@ -4334,29 +4202,29 @@
         </p:nvSpPr>
         <p:spPr>
           <a:xfrm>
-            <a:off x="7269480" y="5687568"/>
-            <a:ext cx="4206240" cy="502920"/>
-          </a:xfrm>
-          <a:prstGeom prst="rect">
-            <a:avLst/>
-          </a:prstGeom>
-          <a:noFill/>
-        </p:spPr>
-        <p:txBody>
-          <a:bodyPr wrap="square" lIns="0" rIns="0" tIns="0" bIns="0" anchor="ctr">
+            <a:off x="7269480" y="5858236"/>
+            <a:ext cx="4206240" cy="161583"/>
+          </a:xfrm>
+          <a:prstGeom prst="rect">
+            <a:avLst/>
+          </a:prstGeom>
+          <a:noFill/>
+        </p:spPr>
+        <p:txBody>
+          <a:bodyPr wrap="square" lIns="0" tIns="0" rIns="0" bIns="0" anchor="ctr">
             <a:spAutoFit/>
           </a:bodyPr>
           <a:lstStyle/>
           <a:p>
             <a:pPr algn="r"/>
             <a:r>
-              <a:rPr sz="1050" b="1" i="0">
+              <a:rPr lang="en-GB" sz="1050" b="1" dirty="0">
                 <a:solidFill>
                   <a:schemeClr val="accent1"/>
                 </a:solidFill>
                 <a:latin typeface="Courier New"/>
               </a:rPr>
-              <a:t>github.com/DEEFIBAO/Workshop-3---PCAP-file-analysis</a:t>
+              <a:t>github.com/DEEFIBAO/Workshop3_PCAP-Sentinel</a:t>
             </a:r>
           </a:p>
         </p:txBody>
@@ -4389,9 +4257,11 @@
       <p:sp>
         <p:nvSpPr>
           <p:cNvPr id="3" name="Text 1"/>
-          <p:cNvSpPr/>
+          <p:cNvSpPr>
+            <a:spLocks noGrp="1"/>
+          </p:cNvSpPr>
           <p:nvPr>
-            <p:ph idx="102" type="title" hasCustomPrompt="1"/>
+            <p:ph type="title" idx="102" hasCustomPrompt="1"/>
           </p:nvPr>
         </p:nvSpPr>
         <p:spPr>
@@ -4409,7 +4279,7 @@
           <a:bodyPr wrap="square" lIns="0" tIns="0" rIns="0" bIns="0" rtlCol="0" anchor="ctr"/>
           <a:lstStyle/>
           <a:p>
-            <a:pPr algn="l" indent="0" marL="0">
+            <a:pPr marL="0" indent="0" algn="l">
               <a:buNone/>
             </a:pPr>
             <a:r>
@@ -4447,7 +4317,7 @@
           </a:prstGeom>
           <a:extLst>
             <a:ext uri="{C572A759-6A51-4108-AA02-DFA0A04FC94B}">
-              <ma14:wrappingTextBoxFlag xmlns:ma14="http://schemas.microsoft.com/office/mac/drawingml/2011/main" val="0"/>
+              <ma14:wrappingTextBoxFlag xmlns:ma14="http://schemas.microsoft.com/office/mac/drawingml/2011/main" xmlns="" val="0"/>
             </a:ext>
           </a:extLst>
         </p:spPr>
@@ -4468,7 +4338,7 @@
           <a:p>
             <a:pPr algn="r"/>
             <a:fld id="{F7021451-1387-4CA6-816F-3879F97B5CBC}" type="slidenum">
-              <a:rPr b="0" lang="en-US"/>
+              <a:rPr lang="en-US" b="0"/>
               <a:t>4</a:t>
             </a:fld>
             <a:endParaRPr lang="en-US"/>
@@ -4492,7 +4362,7 @@
           <a:noFill/>
         </p:spPr>
         <p:txBody>
-          <a:bodyPr wrap="square" lIns="0" rIns="0" tIns="0" bIns="0" anchor="ctr">
+          <a:bodyPr wrap="square" lIns="0" tIns="0" rIns="0" bIns="0" anchor="ctr">
             <a:spAutoFit/>
           </a:bodyPr>
           <a:lstStyle/>
@@ -4526,7 +4396,7 @@
           <a:noFill/>
         </p:spPr>
         <p:txBody>
-          <a:bodyPr wrap="square" lIns="0" rIns="0" tIns="0" bIns="0" anchor="t">
+          <a:bodyPr wrap="square" lIns="0" tIns="0" rIns="0" bIns="0" anchor="t">
             <a:spAutoFit/>
           </a:bodyPr>
           <a:lstStyle/>
@@ -4585,6 +4455,7 @@
           <a:lstStyle/>
           <a:p>
             <a:pPr algn="ctr"/>
+            <a:endParaRPr/>
           </a:p>
         </p:txBody>
       </p:sp>
@@ -4605,7 +4476,7 @@
           <a:noFill/>
         </p:spPr>
         <p:txBody>
-          <a:bodyPr wrap="square" lIns="0" rIns="0" tIns="0" bIns="0" anchor="ctr">
+          <a:bodyPr wrap="square" lIns="0" tIns="0" rIns="0" bIns="0" anchor="ctr">
             <a:spAutoFit/>
           </a:bodyPr>
           <a:lstStyle/>
@@ -4640,7 +4511,7 @@
           <a:noFill/>
         </p:spPr>
         <p:txBody>
-          <a:bodyPr wrap="square" lIns="0" rIns="0" tIns="0" bIns="0" anchor="t">
+          <a:bodyPr wrap="square" lIns="0" tIns="0" rIns="0" bIns="0" anchor="t">
             <a:spAutoFit/>
           </a:bodyPr>
           <a:lstStyle/>
@@ -4673,7 +4544,7 @@
           <a:noFill/>
         </p:spPr>
         <p:txBody>
-          <a:bodyPr wrap="square" lIns="0" rIns="0" tIns="0" bIns="0" anchor="t">
+          <a:bodyPr wrap="square" lIns="0" tIns="0" rIns="0" bIns="0" anchor="t">
             <a:spAutoFit/>
           </a:bodyPr>
           <a:lstStyle/>
@@ -4732,6 +4603,7 @@
           <a:lstStyle/>
           <a:p>
             <a:pPr algn="ctr"/>
+            <a:endParaRPr/>
           </a:p>
         </p:txBody>
       </p:sp>
@@ -4752,7 +4624,7 @@
           <a:noFill/>
         </p:spPr>
         <p:txBody>
-          <a:bodyPr wrap="square" lIns="0" rIns="0" tIns="0" bIns="0" anchor="ctr">
+          <a:bodyPr wrap="square" lIns="0" tIns="0" rIns="0" bIns="0" anchor="ctr">
             <a:spAutoFit/>
           </a:bodyPr>
           <a:lstStyle/>
@@ -4787,7 +4659,7 @@
           <a:noFill/>
         </p:spPr>
         <p:txBody>
-          <a:bodyPr wrap="square" lIns="0" rIns="0" tIns="0" bIns="0" anchor="t">
+          <a:bodyPr wrap="square" lIns="0" tIns="0" rIns="0" bIns="0" anchor="t">
             <a:spAutoFit/>
           </a:bodyPr>
           <a:lstStyle/>
@@ -4820,7 +4692,7 @@
           <a:noFill/>
         </p:spPr>
         <p:txBody>
-          <a:bodyPr wrap="square" lIns="0" rIns="0" tIns="0" bIns="0" anchor="t">
+          <a:bodyPr wrap="square" lIns="0" tIns="0" rIns="0" bIns="0" anchor="t">
             <a:spAutoFit/>
           </a:bodyPr>
           <a:lstStyle/>
@@ -4879,6 +4751,7 @@
           <a:lstStyle/>
           <a:p>
             <a:pPr algn="ctr"/>
+            <a:endParaRPr/>
           </a:p>
         </p:txBody>
       </p:sp>
@@ -4899,7 +4772,7 @@
           <a:noFill/>
         </p:spPr>
         <p:txBody>
-          <a:bodyPr wrap="square" lIns="0" rIns="0" tIns="0" bIns="0" anchor="ctr">
+          <a:bodyPr wrap="square" lIns="0" tIns="0" rIns="0" bIns="0" anchor="ctr">
             <a:spAutoFit/>
           </a:bodyPr>
           <a:lstStyle/>
@@ -4934,7 +4807,7 @@
           <a:noFill/>
         </p:spPr>
         <p:txBody>
-          <a:bodyPr wrap="square" lIns="0" rIns="0" tIns="0" bIns="0" anchor="t">
+          <a:bodyPr wrap="square" lIns="0" tIns="0" rIns="0" bIns="0" anchor="t">
             <a:spAutoFit/>
           </a:bodyPr>
           <a:lstStyle/>
@@ -4967,7 +4840,7 @@
           <a:noFill/>
         </p:spPr>
         <p:txBody>
-          <a:bodyPr wrap="square" lIns="0" rIns="0" tIns="0" bIns="0" anchor="t">
+          <a:bodyPr wrap="square" lIns="0" tIns="0" rIns="0" bIns="0" anchor="t">
             <a:spAutoFit/>
           </a:bodyPr>
           <a:lstStyle/>
@@ -5026,6 +4899,7 @@
           <a:lstStyle/>
           <a:p>
             <a:pPr algn="ctr"/>
+            <a:endParaRPr/>
           </a:p>
         </p:txBody>
       </p:sp>
@@ -5046,7 +4920,7 @@
           <a:noFill/>
         </p:spPr>
         <p:txBody>
-          <a:bodyPr wrap="square" lIns="0" rIns="0" tIns="0" bIns="0" anchor="ctr">
+          <a:bodyPr wrap="square" lIns="0" tIns="0" rIns="0" bIns="0" anchor="ctr">
             <a:spAutoFit/>
           </a:bodyPr>
           <a:lstStyle/>
@@ -5081,7 +4955,7 @@
           <a:noFill/>
         </p:spPr>
         <p:txBody>
-          <a:bodyPr wrap="square" lIns="0" rIns="0" tIns="0" bIns="0" anchor="t">
+          <a:bodyPr wrap="square" lIns="0" tIns="0" rIns="0" bIns="0" anchor="t">
             <a:spAutoFit/>
           </a:bodyPr>
           <a:lstStyle/>
@@ -5114,7 +4988,7 @@
           <a:noFill/>
         </p:spPr>
         <p:txBody>
-          <a:bodyPr wrap="square" lIns="0" rIns="0" tIns="0" bIns="0" anchor="t">
+          <a:bodyPr wrap="square" lIns="0" tIns="0" rIns="0" bIns="0" anchor="t">
             <a:spAutoFit/>
           </a:bodyPr>
           <a:lstStyle/>
@@ -5173,7 +5047,9 @@
         <p:txBody>
           <a:bodyPr rtlCol="0" anchor="ctr"/>
           <a:lstStyle/>
-          <a:p/>
+          <a:p>
+            <a:endParaRPr/>
+          </a:p>
         </p:txBody>
       </p:sp>
       <p:sp>
@@ -5193,7 +5069,7 @@
           <a:noFill/>
         </p:spPr>
         <p:txBody>
-          <a:bodyPr wrap="square" lIns="0" rIns="0" tIns="0" bIns="0" anchor="ctr">
+          <a:bodyPr wrap="square" lIns="0" tIns="0" rIns="0" bIns="0" anchor="ctr">
             <a:spAutoFit/>
           </a:bodyPr>
           <a:lstStyle/>
@@ -5251,7 +5127,7 @@
           <a:noFill/>
         </p:spPr>
         <p:txBody>
-          <a:bodyPr wrap="square" lIns="0" rIns="0" tIns="0" bIns="0" anchor="t">
+          <a:bodyPr wrap="square" lIns="0" tIns="0" rIns="0" bIns="0" anchor="t">
             <a:spAutoFit/>
           </a:bodyPr>
           <a:lstStyle/>
@@ -5310,7 +5186,9 @@
         <p:txBody>
           <a:bodyPr rtlCol="0" anchor="ctr"/>
           <a:lstStyle/>
-          <a:p/>
+          <a:p>
+            <a:endParaRPr/>
+          </a:p>
         </p:txBody>
       </p:sp>
       <p:sp>
@@ -5330,7 +5208,7 @@
           <a:noFill/>
         </p:spPr>
         <p:txBody>
-          <a:bodyPr wrap="square" lIns="0" rIns="0" tIns="0" bIns="0" anchor="t">
+          <a:bodyPr wrap="square" lIns="0" tIns="0" rIns="0" bIns="0" anchor="t">
             <a:spAutoFit/>
           </a:bodyPr>
           <a:lstStyle/>
@@ -5373,7 +5251,7 @@
           <a:noFill/>
         </p:spPr>
         <p:txBody>
-          <a:bodyPr wrap="square" lIns="0" rIns="0" tIns="0" bIns="0" anchor="t">
+          <a:bodyPr wrap="square" lIns="0" tIns="0" rIns="0" bIns="0" anchor="t">
             <a:spAutoFit/>
           </a:bodyPr>
           <a:lstStyle/>
@@ -5407,7 +5285,7 @@
           <a:noFill/>
         </p:spPr>
         <p:txBody>
-          <a:bodyPr wrap="square" lIns="0" rIns="0" tIns="0" bIns="0" anchor="t">
+          <a:bodyPr wrap="square" lIns="0" tIns="0" rIns="0" bIns="0" anchor="t">
             <a:spAutoFit/>
           </a:bodyPr>
           <a:lstStyle/>
@@ -5466,7 +5344,9 @@
         <p:txBody>
           <a:bodyPr rtlCol="0" anchor="ctr"/>
           <a:lstStyle/>
-          <a:p/>
+          <a:p>
+            <a:endParaRPr/>
+          </a:p>
         </p:txBody>
       </p:sp>
       <p:sp>
@@ -5486,7 +5366,7 @@
           <a:noFill/>
         </p:spPr>
         <p:txBody>
-          <a:bodyPr wrap="square" lIns="0" rIns="0" tIns="0" bIns="0" anchor="t">
+          <a:bodyPr wrap="square" lIns="0" tIns="0" rIns="0" bIns="0" anchor="t">
             <a:spAutoFit/>
           </a:bodyPr>
           <a:lstStyle/>
@@ -5529,7 +5409,7 @@
           <a:noFill/>
         </p:spPr>
         <p:txBody>
-          <a:bodyPr wrap="square" lIns="0" rIns="0" tIns="0" bIns="0" anchor="t">
+          <a:bodyPr wrap="square" lIns="0" tIns="0" rIns="0" bIns="0" anchor="t">
             <a:spAutoFit/>
           </a:bodyPr>
           <a:lstStyle/>
@@ -5563,7 +5443,7 @@
           <a:noFill/>
         </p:spPr>
         <p:txBody>
-          <a:bodyPr wrap="square" lIns="0" rIns="0" tIns="0" bIns="0" anchor="t">
+          <a:bodyPr wrap="square" lIns="0" tIns="0" rIns="0" bIns="0" anchor="t">
             <a:spAutoFit/>
           </a:bodyPr>
           <a:lstStyle/>
@@ -5622,7 +5502,9 @@
         <p:txBody>
           <a:bodyPr rtlCol="0" anchor="ctr"/>
           <a:lstStyle/>
-          <a:p/>
+          <a:p>
+            <a:endParaRPr/>
+          </a:p>
         </p:txBody>
       </p:sp>
       <p:sp>
@@ -5642,7 +5524,7 @@
           <a:noFill/>
         </p:spPr>
         <p:txBody>
-          <a:bodyPr wrap="square" lIns="0" rIns="0" tIns="0" bIns="0" anchor="t">
+          <a:bodyPr wrap="square" lIns="0" tIns="0" rIns="0" bIns="0" anchor="t">
             <a:spAutoFit/>
           </a:bodyPr>
           <a:lstStyle/>
@@ -5685,7 +5567,7 @@
           <a:noFill/>
         </p:spPr>
         <p:txBody>
-          <a:bodyPr wrap="square" lIns="0" rIns="0" tIns="0" bIns="0" anchor="t">
+          <a:bodyPr wrap="square" lIns="0" tIns="0" rIns="0" bIns="0" anchor="t">
             <a:spAutoFit/>
           </a:bodyPr>
           <a:lstStyle/>
@@ -5719,7 +5601,7 @@
           <a:noFill/>
         </p:spPr>
         <p:txBody>
-          <a:bodyPr wrap="square" lIns="0" rIns="0" tIns="0" bIns="0" anchor="t">
+          <a:bodyPr wrap="square" lIns="0" tIns="0" rIns="0" bIns="0" anchor="t">
             <a:spAutoFit/>
           </a:bodyPr>
           <a:lstStyle/>
@@ -5778,7 +5660,9 @@
         <p:txBody>
           <a:bodyPr rtlCol="0" anchor="ctr"/>
           <a:lstStyle/>
-          <a:p/>
+          <a:p>
+            <a:endParaRPr/>
+          </a:p>
         </p:txBody>
       </p:sp>
       <p:sp>
@@ -5798,7 +5682,7 @@
           <a:noFill/>
         </p:spPr>
         <p:txBody>
-          <a:bodyPr wrap="square" lIns="0" rIns="0" tIns="0" bIns="0" anchor="t">
+          <a:bodyPr wrap="square" lIns="0" tIns="0" rIns="0" bIns="0" anchor="t">
             <a:spAutoFit/>
           </a:bodyPr>
           <a:lstStyle/>
@@ -5841,7 +5725,7 @@
           <a:noFill/>
         </p:spPr>
         <p:txBody>
-          <a:bodyPr wrap="square" lIns="0" rIns="0" tIns="0" bIns="0" anchor="t">
+          <a:bodyPr wrap="square" lIns="0" tIns="0" rIns="0" bIns="0" anchor="t">
             <a:spAutoFit/>
           </a:bodyPr>
           <a:lstStyle/>
@@ -5875,7 +5759,7 @@
           <a:noFill/>
         </p:spPr>
         <p:txBody>
-          <a:bodyPr wrap="square" lIns="0" rIns="0" tIns="0" bIns="0" anchor="t">
+          <a:bodyPr wrap="square" lIns="0" tIns="0" rIns="0" bIns="0" anchor="t">
             <a:spAutoFit/>
           </a:bodyPr>
           <a:lstStyle/>
@@ -5908,7 +5792,7 @@
           <a:noFill/>
         </p:spPr>
         <p:txBody>
-          <a:bodyPr wrap="square" lIns="0" rIns="0" tIns="0" bIns="0" anchor="t">
+          <a:bodyPr wrap="square" lIns="0" tIns="0" rIns="0" bIns="0" anchor="t">
             <a:spAutoFit/>
           </a:bodyPr>
           <a:lstStyle/>
@@ -5949,7 +5833,7 @@
           <a:noFill/>
         </p:spPr>
         <p:txBody>
-          <a:bodyPr wrap="square" lIns="0" rIns="0" tIns="0" bIns="0" anchor="t">
+          <a:bodyPr wrap="square" lIns="0" tIns="0" rIns="0" bIns="0" anchor="t">
             <a:spAutoFit/>
           </a:bodyPr>
           <a:lstStyle/>
@@ -6001,9 +5885,11 @@
       <p:sp>
         <p:nvSpPr>
           <p:cNvPr id="3" name="Text 1"/>
-          <p:cNvSpPr/>
+          <p:cNvSpPr>
+            <a:spLocks noGrp="1"/>
+          </p:cNvSpPr>
           <p:nvPr>
-            <p:ph idx="102" type="title" hasCustomPrompt="1"/>
+            <p:ph type="title" idx="102" hasCustomPrompt="1"/>
           </p:nvPr>
         </p:nvSpPr>
         <p:spPr>
@@ -6021,7 +5907,7 @@
           <a:bodyPr wrap="square" lIns="0" tIns="0" rIns="0" bIns="0" rtlCol="0" anchor="ctr"/>
           <a:lstStyle/>
           <a:p>
-            <a:pPr algn="l" indent="0" marL="0">
+            <a:pPr marL="0" indent="0" algn="l">
               <a:buNone/>
             </a:pPr>
             <a:r>
@@ -6059,7 +5945,7 @@
           </a:prstGeom>
           <a:extLst>
             <a:ext uri="{C572A759-6A51-4108-AA02-DFA0A04FC94B}">
-              <ma14:wrappingTextBoxFlag xmlns:ma14="http://schemas.microsoft.com/office/mac/drawingml/2011/main" val="0"/>
+              <ma14:wrappingTextBoxFlag xmlns:ma14="http://schemas.microsoft.com/office/mac/drawingml/2011/main" xmlns="" val="0"/>
             </a:ext>
           </a:extLst>
         </p:spPr>
@@ -6080,7 +5966,7 @@
           <a:p>
             <a:pPr algn="r"/>
             <a:fld id="{F7021451-1387-4CA6-816F-3879F97B5CBC}" type="slidenum">
-              <a:rPr b="0" lang="en-US"/>
+              <a:rPr lang="en-US" b="0"/>
               <a:t>5</a:t>
             </a:fld>
             <a:endParaRPr lang="en-US"/>
@@ -6104,7 +5990,7 @@
           <a:noFill/>
         </p:spPr>
         <p:txBody>
-          <a:bodyPr wrap="square" lIns="0" rIns="0" tIns="0" bIns="0" anchor="ctr">
+          <a:bodyPr wrap="square" lIns="0" tIns="0" rIns="0" bIns="0" anchor="ctr">
             <a:spAutoFit/>
           </a:bodyPr>
           <a:lstStyle/>
@@ -6138,7 +6024,7 @@
           <a:noFill/>
         </p:spPr>
         <p:txBody>
-          <a:bodyPr wrap="square" lIns="0" rIns="0" tIns="0" bIns="0" anchor="t">
+          <a:bodyPr wrap="square" lIns="0" tIns="0" rIns="0" bIns="0" anchor="t">
             <a:spAutoFit/>
           </a:bodyPr>
           <a:lstStyle/>
@@ -6171,7 +6057,7 @@
           <a:noFill/>
         </p:spPr>
         <p:txBody>
-          <a:bodyPr wrap="square" lIns="0" rIns="0" tIns="0" bIns="0" anchor="ctr">
+          <a:bodyPr wrap="square" lIns="0" tIns="0" rIns="0" bIns="0" anchor="ctr">
             <a:spAutoFit/>
           </a:bodyPr>
           <a:lstStyle/>
@@ -6205,7 +6091,7 @@
           <a:noFill/>
         </p:spPr>
         <p:txBody>
-          <a:bodyPr wrap="square" lIns="0" rIns="0" tIns="0" bIns="0" anchor="t">
+          <a:bodyPr wrap="square" lIns="0" tIns="0" rIns="0" bIns="0" anchor="t">
             <a:spAutoFit/>
           </a:bodyPr>
           <a:lstStyle/>
@@ -6238,7 +6124,7 @@
           <a:noFill/>
         </p:spPr>
         <p:txBody>
-          <a:bodyPr wrap="square" lIns="0" rIns="0" tIns="0" bIns="0" anchor="t">
+          <a:bodyPr wrap="square" lIns="0" tIns="0" rIns="0" bIns="0" anchor="t">
             <a:spAutoFit/>
           </a:bodyPr>
           <a:lstStyle/>
@@ -6271,7 +6157,7 @@
           <a:noFill/>
         </p:spPr>
         <p:txBody>
-          <a:bodyPr wrap="square" lIns="0" rIns="0" tIns="0" bIns="0" anchor="ctr">
+          <a:bodyPr wrap="square" lIns="0" tIns="0" rIns="0" bIns="0" anchor="ctr">
             <a:spAutoFit/>
           </a:bodyPr>
           <a:lstStyle/>
@@ -6305,7 +6191,7 @@
           <a:noFill/>
         </p:spPr>
         <p:txBody>
-          <a:bodyPr wrap="square" lIns="0" rIns="0" tIns="0" bIns="0" anchor="t">
+          <a:bodyPr wrap="square" lIns="0" tIns="0" rIns="0" bIns="0" anchor="t">
             <a:spAutoFit/>
           </a:bodyPr>
           <a:lstStyle/>
@@ -6338,7 +6224,7 @@
           <a:noFill/>
         </p:spPr>
         <p:txBody>
-          <a:bodyPr wrap="square" lIns="0" rIns="0" tIns="0" bIns="0" anchor="t">
+          <a:bodyPr wrap="square" lIns="0" tIns="0" rIns="0" bIns="0" anchor="t">
             <a:spAutoFit/>
           </a:bodyPr>
           <a:lstStyle/>
@@ -6371,7 +6257,7 @@
           <a:noFill/>
         </p:spPr>
         <p:txBody>
-          <a:bodyPr wrap="square" lIns="0" rIns="0" tIns="0" bIns="0" anchor="ctr">
+          <a:bodyPr wrap="square" lIns="0" tIns="0" rIns="0" bIns="0" anchor="ctr">
             <a:spAutoFit/>
           </a:bodyPr>
           <a:lstStyle/>
@@ -6405,7 +6291,7 @@
           <a:noFill/>
         </p:spPr>
         <p:txBody>
-          <a:bodyPr wrap="square" lIns="0" rIns="0" tIns="0" bIns="0" anchor="t">
+          <a:bodyPr wrap="square" lIns="0" tIns="0" rIns="0" bIns="0" anchor="t">
             <a:spAutoFit/>
           </a:bodyPr>
           <a:lstStyle/>
@@ -6438,7 +6324,7 @@
           <a:noFill/>
         </p:spPr>
         <p:txBody>
-          <a:bodyPr wrap="square" lIns="0" rIns="0" tIns="0" bIns="0" anchor="t">
+          <a:bodyPr wrap="square" lIns="0" tIns="0" rIns="0" bIns="0" anchor="t">
             <a:spAutoFit/>
           </a:bodyPr>
           <a:lstStyle/>
@@ -6471,7 +6357,7 @@
           <a:noFill/>
         </p:spPr>
         <p:txBody>
-          <a:bodyPr wrap="square" lIns="0" rIns="0" tIns="0" bIns="0" anchor="ctr">
+          <a:bodyPr wrap="square" lIns="0" tIns="0" rIns="0" bIns="0" anchor="ctr">
             <a:spAutoFit/>
           </a:bodyPr>
           <a:lstStyle/>
@@ -6505,7 +6391,7 @@
           <a:noFill/>
         </p:spPr>
         <p:txBody>
-          <a:bodyPr wrap="square" lIns="0" rIns="0" tIns="0" bIns="0" anchor="t">
+          <a:bodyPr wrap="square" lIns="0" tIns="0" rIns="0" bIns="0" anchor="t">
             <a:spAutoFit/>
           </a:bodyPr>
           <a:lstStyle/>
@@ -6538,7 +6424,7 @@
           <a:noFill/>
         </p:spPr>
         <p:txBody>
-          <a:bodyPr wrap="square" lIns="0" rIns="0" tIns="0" bIns="0" anchor="t">
+          <a:bodyPr wrap="square" lIns="0" tIns="0" rIns="0" bIns="0" anchor="t">
             <a:spAutoFit/>
           </a:bodyPr>
           <a:lstStyle/>
@@ -6571,7 +6457,7 @@
           <a:noFill/>
         </p:spPr>
         <p:txBody>
-          <a:bodyPr wrap="square" lIns="0" rIns="0" tIns="0" bIns="0" anchor="ctr">
+          <a:bodyPr wrap="square" lIns="0" tIns="0" rIns="0" bIns="0" anchor="ctr">
             <a:spAutoFit/>
           </a:bodyPr>
           <a:lstStyle/>
@@ -6605,7 +6491,7 @@
           <a:noFill/>
         </p:spPr>
         <p:txBody>
-          <a:bodyPr wrap="square" lIns="0" rIns="0" tIns="0" bIns="0" anchor="t">
+          <a:bodyPr wrap="square" lIns="0" tIns="0" rIns="0" bIns="0" anchor="t">
             <a:spAutoFit/>
           </a:bodyPr>
           <a:lstStyle/>
@@ -6638,7 +6524,7 @@
           <a:noFill/>
         </p:spPr>
         <p:txBody>
-          <a:bodyPr wrap="square" lIns="0" rIns="0" tIns="0" bIns="0" anchor="t">
+          <a:bodyPr wrap="square" lIns="0" tIns="0" rIns="0" bIns="0" anchor="t">
             <a:spAutoFit/>
           </a:bodyPr>
           <a:lstStyle/>
@@ -6697,7 +6583,9 @@
         <p:txBody>
           <a:bodyPr rtlCol="0" anchor="ctr"/>
           <a:lstStyle/>
-          <a:p/>
+          <a:p>
+            <a:endParaRPr/>
+          </a:p>
         </p:txBody>
       </p:sp>
       <p:pic>
@@ -6709,7 +6597,7 @@
           <p:nvPr/>
         </p:nvPicPr>
         <p:blipFill>
-          <a:blip r:embed="rId6"/>
+          <a:blip r:embed="rId3"/>
           <a:stretch>
             <a:fillRect/>
           </a:stretch>
@@ -6741,7 +6629,7 @@
           <a:noFill/>
         </p:spPr>
         <p:txBody>
-          <a:bodyPr wrap="square" lIns="0" rIns="0" tIns="0" bIns="0" anchor="ctr">
+          <a:bodyPr wrap="square" lIns="0" tIns="0" rIns="0" bIns="0" anchor="ctr">
             <a:spAutoFit/>
           </a:bodyPr>
           <a:lstStyle/>
@@ -6775,7 +6663,7 @@
           <a:noFill/>
         </p:spPr>
         <p:txBody>
-          <a:bodyPr wrap="square" lIns="0" rIns="0" tIns="0" bIns="0" anchor="t">
+          <a:bodyPr wrap="square" lIns="0" tIns="0" rIns="0" bIns="0" anchor="t">
             <a:spAutoFit/>
           </a:bodyPr>
           <a:lstStyle/>
@@ -6834,7 +6722,9 @@
         <p:txBody>
           <a:bodyPr rtlCol="0" anchor="ctr"/>
           <a:lstStyle/>
-          <a:p/>
+          <a:p>
+            <a:endParaRPr/>
+          </a:p>
         </p:txBody>
       </p:sp>
       <p:pic>
@@ -6846,7 +6736,7 @@
           <p:nvPr/>
         </p:nvPicPr>
         <p:blipFill>
-          <a:blip r:embed="rId3"/>
+          <a:blip r:embed="rId4"/>
           <a:stretch>
             <a:fillRect/>
           </a:stretch>
@@ -6878,7 +6768,7 @@
           <a:noFill/>
         </p:spPr>
         <p:txBody>
-          <a:bodyPr wrap="square" lIns="0" rIns="0" tIns="0" bIns="0" anchor="ctr">
+          <a:bodyPr wrap="square" lIns="0" tIns="0" rIns="0" bIns="0" anchor="ctr">
             <a:spAutoFit/>
           </a:bodyPr>
           <a:lstStyle/>
@@ -6912,7 +6802,7 @@
           <a:noFill/>
         </p:spPr>
         <p:txBody>
-          <a:bodyPr wrap="square" lIns="0" rIns="0" tIns="0" bIns="0" anchor="t">
+          <a:bodyPr wrap="square" lIns="0" tIns="0" rIns="0" bIns="0" anchor="t">
             <a:spAutoFit/>
           </a:bodyPr>
           <a:lstStyle/>
@@ -7027,7 +6917,7 @@
           <a:noFill/>
         </p:spPr>
         <p:txBody>
-          <a:bodyPr wrap="square" lIns="0" rIns="0" tIns="0" bIns="0" anchor="t">
+          <a:bodyPr wrap="square" lIns="0" tIns="0" rIns="0" bIns="0" anchor="t">
             <a:spAutoFit/>
           </a:bodyPr>
           <a:lstStyle/>
@@ -7068,7 +6958,7 @@
 </file>
 
 <file path=ppt/slides/slide6.xml><?xml version="1.0" encoding="utf-8"?>
-<p:sld xmlns:a="http://schemas.openxmlformats.org/drawingml/2006/main" xmlns:p="http://schemas.openxmlformats.org/presentationml/2006/main" xmlns:r="http://schemas.openxmlformats.org/officeDocument/2006/relationships">
+<p:sld xmlns:a="http://schemas.openxmlformats.org/drawingml/2006/main" xmlns:r="http://schemas.openxmlformats.org/officeDocument/2006/relationships" xmlns:p="http://schemas.openxmlformats.org/presentationml/2006/main">
   <p:cSld>
     <p:spTree>
       <p:nvGrpSpPr>
@@ -7076,13 +6966,22 @@
         <p:cNvGrpSpPr/>
         <p:nvPr/>
       </p:nvGrpSpPr>
-      <p:grpSpPr/>
+      <p:grpSpPr>
+        <a:xfrm>
+          <a:off x="0" y="0"/>
+          <a:ext cx="0" cy="0"/>
+          <a:chOff x="0" y="0"/>
+          <a:chExt cx="0" cy="0"/>
+        </a:xfrm>
+      </p:grpSpPr>
       <p:sp>
         <p:nvSpPr>
           <p:cNvPr id="3" name="Text 1"/>
-          <p:cNvSpPr/>
+          <p:cNvSpPr>
+            <a:spLocks noGrp="1"/>
+          </p:cNvSpPr>
           <p:nvPr>
-            <p:ph idx="102" type="title" hasCustomPrompt="1"/>
+            <p:ph type="title" idx="102" hasCustomPrompt="1"/>
           </p:nvPr>
         </p:nvSpPr>
         <p:spPr>
@@ -7100,7 +6999,7 @@
           <a:bodyPr wrap="square" lIns="0" tIns="0" rIns="0" bIns="0" rtlCol="0" anchor="ctr"/>
           <a:lstStyle/>
           <a:p>
-            <a:pPr algn="l" indent="0" marL="0">
+            <a:pPr marL="0" indent="0" algn="l">
               <a:buNone/>
             </a:pPr>
             <a:r>
@@ -7138,7 +7037,7 @@
           </a:prstGeom>
           <a:extLst>
             <a:ext uri="{C572A759-6A51-4108-AA02-DFA0A04FC94B}">
-              <ma14:wrappingTextBoxFlag xmlns:ma14="http://schemas.microsoft.com/office/mac/drawingml/2011/main" val="0"/>
+              <ma14:wrappingTextBoxFlag xmlns:ma14="http://schemas.microsoft.com/office/mac/drawingml/2011/main" xmlns="" val="0"/>
             </a:ext>
           </a:extLst>
         </p:spPr>
@@ -7159,8 +7058,8 @@
           <a:p>
             <a:pPr algn="r"/>
             <a:fld id="{F7021451-1387-4CA6-816F-3879F97B5CBC}" type="slidenum">
-              <a:rPr b="0" lang="en-US"/>
-              <a:t>2</a:t>
+              <a:rPr lang="en-US" b="0"/>
+              <a:t>6</a:t>
             </a:fld>
             <a:endParaRPr lang="en-US"/>
           </a:p>
@@ -7183,7 +7082,7 @@
           <a:noFill/>
         </p:spPr>
         <p:txBody>
-          <a:bodyPr wrap="square" lIns="0" rIns="0" tIns="0" bIns="0" anchor="ctr">
+          <a:bodyPr wrap="square" lIns="0" tIns="0" rIns="0" bIns="0" anchor="ctr">
             <a:spAutoFit/>
           </a:bodyPr>
           <a:lstStyle/>
@@ -7243,7 +7142,9 @@
         <p:txBody>
           <a:bodyPr rtlCol="0" anchor="ctr"/>
           <a:lstStyle/>
-          <a:p/>
+          <a:p>
+            <a:endParaRPr/>
+          </a:p>
         </p:txBody>
       </p:sp>
       <p:sp>
@@ -7263,7 +7164,7 @@
           <a:noFill/>
         </p:spPr>
         <p:txBody>
-          <a:bodyPr wrap="square" lIns="0" rIns="0" tIns="0" bIns="0" anchor="ctr">
+          <a:bodyPr wrap="square" lIns="0" tIns="0" rIns="0" bIns="0" anchor="ctr">
             <a:spAutoFit/>
           </a:bodyPr>
           <a:lstStyle/>
@@ -7297,7 +7198,7 @@
           <a:noFill/>
         </p:spPr>
         <p:txBody>
-          <a:bodyPr wrap="square" lIns="0" rIns="0" tIns="0" bIns="0" anchor="ctr">
+          <a:bodyPr wrap="square" lIns="0" tIns="0" rIns="0" bIns="0" anchor="ctr">
             <a:spAutoFit/>
           </a:bodyPr>
           <a:lstStyle/>
@@ -7393,7 +7294,9 @@
         <p:txBody>
           <a:bodyPr rtlCol="0" anchor="ctr"/>
           <a:lstStyle/>
-          <a:p/>
+          <a:p>
+            <a:endParaRPr/>
+          </a:p>
         </p:txBody>
       </p:sp>
       <p:sp>
@@ -7413,7 +7316,7 @@
           <a:noFill/>
         </p:spPr>
         <p:txBody>
-          <a:bodyPr wrap="square" lIns="0" rIns="0" tIns="0" bIns="0" anchor="ctr">
+          <a:bodyPr wrap="square" lIns="0" tIns="0" rIns="0" bIns="0" anchor="ctr">
             <a:spAutoFit/>
           </a:bodyPr>
           <a:lstStyle/>
@@ -7447,7 +7350,7 @@
           <a:noFill/>
         </p:spPr>
         <p:txBody>
-          <a:bodyPr wrap="square" lIns="0" rIns="0" tIns="0" bIns="0" anchor="ctr">
+          <a:bodyPr wrap="square" lIns="0" tIns="0" rIns="0" bIns="0" anchor="ctr">
             <a:spAutoFit/>
           </a:bodyPr>
           <a:lstStyle/>
@@ -7543,7 +7446,9 @@
         <p:txBody>
           <a:bodyPr rtlCol="0" anchor="ctr"/>
           <a:lstStyle/>
-          <a:p/>
+          <a:p>
+            <a:endParaRPr/>
+          </a:p>
         </p:txBody>
       </p:sp>
       <p:sp>
@@ -7563,7 +7468,7 @@
           <a:noFill/>
         </p:spPr>
         <p:txBody>
-          <a:bodyPr wrap="square" lIns="0" rIns="0" tIns="0" bIns="0" anchor="ctr">
+          <a:bodyPr wrap="square" lIns="0" tIns="0" rIns="0" bIns="0" anchor="ctr">
             <a:spAutoFit/>
           </a:bodyPr>
           <a:lstStyle/>
@@ -7597,7 +7502,7 @@
           <a:noFill/>
         </p:spPr>
         <p:txBody>
-          <a:bodyPr wrap="square" lIns="0" rIns="0" tIns="0" bIns="0" anchor="ctr">
+          <a:bodyPr wrap="square" lIns="0" tIns="0" rIns="0" bIns="0" anchor="ctr">
             <a:spAutoFit/>
           </a:bodyPr>
           <a:lstStyle/>
@@ -7693,7 +7598,9 @@
         <p:txBody>
           <a:bodyPr rtlCol="0" anchor="ctr"/>
           <a:lstStyle/>
-          <a:p/>
+          <a:p>
+            <a:endParaRPr/>
+          </a:p>
         </p:txBody>
       </p:sp>
       <p:sp>
@@ -7713,7 +7620,7 @@
           <a:noFill/>
         </p:spPr>
         <p:txBody>
-          <a:bodyPr wrap="square" lIns="0" rIns="0" tIns="0" bIns="0" anchor="ctr">
+          <a:bodyPr wrap="square" lIns="0" tIns="0" rIns="0" bIns="0" anchor="ctr">
             <a:spAutoFit/>
           </a:bodyPr>
           <a:lstStyle/>
@@ -7747,7 +7654,7 @@
           <a:noFill/>
         </p:spPr>
         <p:txBody>
-          <a:bodyPr wrap="square" lIns="0" rIns="0" tIns="0" bIns="0" anchor="ctr">
+          <a:bodyPr wrap="square" lIns="0" tIns="0" rIns="0" bIns="0" anchor="ctr">
             <a:spAutoFit/>
           </a:bodyPr>
           <a:lstStyle/>
@@ -7843,7 +7750,9 @@
         <p:txBody>
           <a:bodyPr rtlCol="0" anchor="ctr"/>
           <a:lstStyle/>
-          <a:p/>
+          <a:p>
+            <a:endParaRPr/>
+          </a:p>
         </p:txBody>
       </p:sp>
       <p:sp>
@@ -7863,7 +7772,7 @@
           <a:noFill/>
         </p:spPr>
         <p:txBody>
-          <a:bodyPr wrap="square" lIns="0" rIns="0" tIns="0" bIns="0" anchor="ctr">
+          <a:bodyPr wrap="square" lIns="0" tIns="0" rIns="0" bIns="0" anchor="ctr">
             <a:spAutoFit/>
           </a:bodyPr>
           <a:lstStyle/>
@@ -7897,7 +7806,7 @@
           <a:noFill/>
         </p:spPr>
         <p:txBody>
-          <a:bodyPr wrap="square" lIns="0" rIns="0" tIns="0" bIns="0" anchor="ctr">
+          <a:bodyPr wrap="square" lIns="0" tIns="0" rIns="0" bIns="0" anchor="ctr">
             <a:spAutoFit/>
           </a:bodyPr>
           <a:lstStyle/>
@@ -7993,7 +7902,9 @@
         <p:txBody>
           <a:bodyPr rtlCol="0" anchor="ctr"/>
           <a:lstStyle/>
-          <a:p/>
+          <a:p>
+            <a:endParaRPr/>
+          </a:p>
         </p:txBody>
       </p:sp>
       <p:sp>
@@ -8013,7 +7924,7 @@
           <a:noFill/>
         </p:spPr>
         <p:txBody>
-          <a:bodyPr wrap="square" lIns="0" rIns="0" tIns="0" bIns="0" anchor="ctr">
+          <a:bodyPr wrap="square" lIns="0" tIns="0" rIns="0" bIns="0" anchor="ctr">
             <a:spAutoFit/>
           </a:bodyPr>
           <a:lstStyle/>
@@ -8047,7 +7958,7 @@
           <a:noFill/>
         </p:spPr>
         <p:txBody>
-          <a:bodyPr wrap="square" lIns="0" rIns="0" tIns="0" bIns="0" anchor="ctr">
+          <a:bodyPr wrap="square" lIns="0" tIns="0" rIns="0" bIns="0" anchor="ctr">
             <a:spAutoFit/>
           </a:bodyPr>
           <a:lstStyle/>
@@ -8107,7 +8018,9 @@
         <p:txBody>
           <a:bodyPr rtlCol="0" anchor="ctr"/>
           <a:lstStyle/>
-          <a:p/>
+          <a:p>
+            <a:endParaRPr/>
+          </a:p>
         </p:txBody>
       </p:sp>
       <p:sp>
@@ -8127,7 +8040,7 @@
           <a:noFill/>
         </p:spPr>
         <p:txBody>
-          <a:bodyPr wrap="square" lIns="0" rIns="0" tIns="0" bIns="0" anchor="ctr">
+          <a:bodyPr wrap="square" lIns="0" tIns="0" rIns="0" bIns="0" anchor="ctr">
             <a:spAutoFit/>
           </a:bodyPr>
           <a:lstStyle/>
@@ -8186,7 +8099,9 @@
         <p:txBody>
           <a:bodyPr rtlCol="0" anchor="ctr"/>
           <a:lstStyle/>
-          <a:p/>
+          <a:p>
+            <a:endParaRPr/>
+          </a:p>
         </p:txBody>
       </p:sp>
       <p:sp>
@@ -8232,7 +8147,9 @@
         <p:txBody>
           <a:bodyPr rtlCol="0" anchor="ctr"/>
           <a:lstStyle/>
-          <a:p/>
+          <a:p>
+            <a:endParaRPr/>
+          </a:p>
         </p:txBody>
       </p:sp>
       <p:sp>
@@ -8252,7 +8169,7 @@
           <a:noFill/>
         </p:spPr>
         <p:txBody>
-          <a:bodyPr wrap="square" lIns="0" rIns="0" tIns="0" bIns="0" anchor="ctr">
+          <a:bodyPr wrap="square" lIns="0" tIns="0" rIns="0" bIns="0" anchor="ctr">
             <a:spAutoFit/>
           </a:bodyPr>
           <a:lstStyle/>
@@ -8311,7 +8228,9 @@
         <p:txBody>
           <a:bodyPr rtlCol="0" anchor="ctr"/>
           <a:lstStyle/>
-          <a:p/>
+          <a:p>
+            <a:endParaRPr/>
+          </a:p>
         </p:txBody>
       </p:sp>
       <p:pic>
@@ -8323,7 +8242,7 @@
           <p:nvPr/>
         </p:nvPicPr>
         <p:blipFill>
-          <a:blip r:embed="rId2"/>
+          <a:blip r:embed="rId3"/>
           <a:stretch>
             <a:fillRect/>
           </a:stretch>
@@ -8355,7 +8274,7 @@
           <a:noFill/>
         </p:spPr>
         <p:txBody>
-          <a:bodyPr wrap="square" lIns="0" rIns="0" tIns="0" bIns="0" anchor="ctr">
+          <a:bodyPr wrap="square" lIns="0" tIns="0" rIns="0" bIns="0" anchor="ctr">
             <a:spAutoFit/>
           </a:bodyPr>
           <a:lstStyle/>
@@ -8388,7 +8307,7 @@
           <a:noFill/>
         </p:spPr>
         <p:txBody>
-          <a:bodyPr wrap="square" lIns="0" rIns="0" tIns="0" bIns="0" anchor="t">
+          <a:bodyPr wrap="square" lIns="0" tIns="0" rIns="0" bIns="0" anchor="t">
             <a:spAutoFit/>
           </a:bodyPr>
           <a:lstStyle/>
@@ -8552,7 +8471,9 @@
         <p:txBody>
           <a:bodyPr rtlCol="0" anchor="ctr"/>
           <a:lstStyle/>
-          <a:p/>
+          <a:p>
+            <a:endParaRPr/>
+          </a:p>
         </p:txBody>
       </p:sp>
       <p:pic>
@@ -8564,7 +8485,7 @@
           <p:nvPr/>
         </p:nvPicPr>
         <p:blipFill>
-          <a:blip r:embed="rId3"/>
+          <a:blip r:embed="rId4"/>
           <a:stretch>
             <a:fillRect/>
           </a:stretch>
@@ -8596,7 +8517,7 @@
           <a:noFill/>
         </p:spPr>
         <p:txBody>
-          <a:bodyPr wrap="square" lIns="0" rIns="0" tIns="0" bIns="0" anchor="ctr">
+          <a:bodyPr wrap="square" lIns="0" tIns="0" rIns="0" bIns="0" anchor="ctr">
             <a:spAutoFit/>
           </a:bodyPr>
           <a:lstStyle/>
@@ -8629,7 +8550,7 @@
           <a:noFill/>
         </p:spPr>
         <p:txBody>
-          <a:bodyPr wrap="square" lIns="0" rIns="0" tIns="0" bIns="0" anchor="t">
+          <a:bodyPr wrap="square" lIns="0" tIns="0" rIns="0" bIns="0" anchor="t">
             <a:spAutoFit/>
           </a:bodyPr>
           <a:lstStyle/>
@@ -8770,7 +8691,9 @@
         <p:txBody>
           <a:bodyPr rtlCol="0" anchor="ctr"/>
           <a:lstStyle/>
-          <a:p/>
+          <a:p>
+            <a:endParaRPr/>
+          </a:p>
         </p:txBody>
       </p:sp>
       <p:pic>
@@ -8782,7 +8705,7 @@
           <p:nvPr/>
         </p:nvPicPr>
         <p:blipFill>
-          <a:blip r:embed="rId4"/>
+          <a:blip r:embed="rId5"/>
           <a:stretch>
             <a:fillRect/>
           </a:stretch>
@@ -8814,7 +8737,7 @@
           <a:noFill/>
         </p:spPr>
         <p:txBody>
-          <a:bodyPr wrap="square" lIns="0" rIns="0" tIns="0" bIns="0" anchor="ctr">
+          <a:bodyPr wrap="square" lIns="0" tIns="0" rIns="0" bIns="0" anchor="ctr">
             <a:spAutoFit/>
           </a:bodyPr>
           <a:lstStyle/>
@@ -8847,7 +8770,7 @@
           <a:noFill/>
         </p:spPr>
         <p:txBody>
-          <a:bodyPr wrap="square" lIns="0" rIns="0" tIns="0" bIns="0" anchor="t">
+          <a:bodyPr wrap="square" lIns="0" tIns="0" rIns="0" bIns="0" anchor="t">
             <a:spAutoFit/>
           </a:bodyPr>
           <a:lstStyle/>
@@ -8964,7 +8887,7 @@
 </file>
 
 <file path=ppt/slides/slide7.xml><?xml version="1.0" encoding="utf-8"?>
-<p:sld xmlns:a="http://schemas.openxmlformats.org/drawingml/2006/main" xmlns:p="http://schemas.openxmlformats.org/presentationml/2006/main" xmlns:r="http://schemas.openxmlformats.org/officeDocument/2006/relationships">
+<p:sld xmlns:a="http://schemas.openxmlformats.org/drawingml/2006/main" xmlns:r="http://schemas.openxmlformats.org/officeDocument/2006/relationships" xmlns:p="http://schemas.openxmlformats.org/presentationml/2006/main">
   <p:cSld>
     <p:spTree>
       <p:nvGrpSpPr>
@@ -8972,13 +8895,22 @@
         <p:cNvGrpSpPr/>
         <p:nvPr/>
       </p:nvGrpSpPr>
-      <p:grpSpPr/>
+      <p:grpSpPr>
+        <a:xfrm>
+          <a:off x="0" y="0"/>
+          <a:ext cx="0" cy="0"/>
+          <a:chOff x="0" y="0"/>
+          <a:chExt cx="0" cy="0"/>
+        </a:xfrm>
+      </p:grpSpPr>
       <p:sp>
         <p:nvSpPr>
           <p:cNvPr id="3" name="Text 1"/>
-          <p:cNvSpPr/>
+          <p:cNvSpPr>
+            <a:spLocks noGrp="1"/>
+          </p:cNvSpPr>
           <p:nvPr>
-            <p:ph idx="102" type="title" hasCustomPrompt="1"/>
+            <p:ph type="title" idx="102" hasCustomPrompt="1"/>
           </p:nvPr>
         </p:nvSpPr>
         <p:spPr>
@@ -8996,7 +8928,7 @@
           <a:bodyPr wrap="square" lIns="0" tIns="0" rIns="0" bIns="0" rtlCol="0" anchor="ctr"/>
           <a:lstStyle/>
           <a:p>
-            <a:pPr algn="l" indent="0" marL="0">
+            <a:pPr marL="0" indent="0" algn="l">
               <a:buNone/>
             </a:pPr>
             <a:r>
@@ -9034,7 +8966,7 @@
           </a:prstGeom>
           <a:extLst>
             <a:ext uri="{C572A759-6A51-4108-AA02-DFA0A04FC94B}">
-              <ma14:wrappingTextBoxFlag xmlns:ma14="http://schemas.microsoft.com/office/mac/drawingml/2011/main" val="0"/>
+              <ma14:wrappingTextBoxFlag xmlns:ma14="http://schemas.microsoft.com/office/mac/drawingml/2011/main" xmlns="" val="0"/>
             </a:ext>
           </a:extLst>
         </p:spPr>
@@ -9055,8 +8987,8 @@
           <a:p>
             <a:pPr algn="r"/>
             <a:fld id="{F7021451-1387-4CA6-816F-3879F97B5CBC}" type="slidenum">
-              <a:rPr b="0" lang="en-US"/>
-              <a:t>2</a:t>
+              <a:rPr lang="en-US" b="0"/>
+              <a:t>7</a:t>
             </a:fld>
             <a:endParaRPr lang="en-US"/>
           </a:p>
@@ -9079,7 +9011,7 @@
           <a:noFill/>
         </p:spPr>
         <p:txBody>
-          <a:bodyPr wrap="square" lIns="0" rIns="0" tIns="0" bIns="0" anchor="ctr">
+          <a:bodyPr wrap="square" lIns="0" tIns="0" rIns="0" bIns="0" anchor="ctr">
             <a:spAutoFit/>
           </a:bodyPr>
           <a:lstStyle/>
@@ -9139,7 +9071,9 @@
         <p:txBody>
           <a:bodyPr rtlCol="0" anchor="ctr"/>
           <a:lstStyle/>
-          <a:p/>
+          <a:p>
+            <a:endParaRPr/>
+          </a:p>
         </p:txBody>
       </p:sp>
       <p:sp>
@@ -9159,7 +9093,7 @@
           <a:noFill/>
         </p:spPr>
         <p:txBody>
-          <a:bodyPr wrap="square" lIns="0" rIns="0" tIns="0" bIns="0" anchor="t">
+          <a:bodyPr wrap="square" lIns="0" tIns="0" rIns="0" bIns="0" anchor="t">
             <a:spAutoFit/>
           </a:bodyPr>
           <a:lstStyle/>
@@ -9193,7 +9127,7 @@
           <a:noFill/>
         </p:spPr>
         <p:txBody>
-          <a:bodyPr wrap="square" lIns="0" rIns="0" tIns="0" bIns="0" anchor="t">
+          <a:bodyPr wrap="square" lIns="0" tIns="0" rIns="0" bIns="0" anchor="t">
             <a:spAutoFit/>
           </a:bodyPr>
           <a:lstStyle/>
@@ -9252,7 +9186,9 @@
         <p:txBody>
           <a:bodyPr rtlCol="0" anchor="ctr"/>
           <a:lstStyle/>
-          <a:p/>
+          <a:p>
+            <a:endParaRPr/>
+          </a:p>
         </p:txBody>
       </p:sp>
       <p:sp>
@@ -9272,7 +9208,7 @@
           <a:noFill/>
         </p:spPr>
         <p:txBody>
-          <a:bodyPr wrap="square" lIns="0" rIns="0" tIns="0" bIns="0" anchor="t">
+          <a:bodyPr wrap="square" lIns="0" tIns="0" rIns="0" bIns="0" anchor="t">
             <a:spAutoFit/>
           </a:bodyPr>
           <a:lstStyle/>
@@ -9306,7 +9242,7 @@
           <a:noFill/>
         </p:spPr>
         <p:txBody>
-          <a:bodyPr wrap="square" lIns="0" rIns="0" tIns="0" bIns="0" anchor="t">
+          <a:bodyPr wrap="square" lIns="0" tIns="0" rIns="0" bIns="0" anchor="t">
             <a:spAutoFit/>
           </a:bodyPr>
           <a:lstStyle/>
@@ -9365,7 +9301,9 @@
         <p:txBody>
           <a:bodyPr rtlCol="0" anchor="ctr"/>
           <a:lstStyle/>
-          <a:p/>
+          <a:p>
+            <a:endParaRPr/>
+          </a:p>
         </p:txBody>
       </p:sp>
       <p:sp>
@@ -9385,7 +9323,7 @@
           <a:noFill/>
         </p:spPr>
         <p:txBody>
-          <a:bodyPr wrap="square" lIns="0" rIns="0" tIns="0" bIns="0" anchor="t">
+          <a:bodyPr wrap="square" lIns="0" tIns="0" rIns="0" bIns="0" anchor="t">
             <a:spAutoFit/>
           </a:bodyPr>
           <a:lstStyle/>
@@ -9419,7 +9357,7 @@
           <a:noFill/>
         </p:spPr>
         <p:txBody>
-          <a:bodyPr wrap="square" lIns="0" rIns="0" tIns="0" bIns="0" anchor="t">
+          <a:bodyPr wrap="square" lIns="0" tIns="0" rIns="0" bIns="0" anchor="t">
             <a:spAutoFit/>
           </a:bodyPr>
           <a:lstStyle/>
@@ -9478,7 +9416,9 @@
         <p:txBody>
           <a:bodyPr rtlCol="0" anchor="ctr"/>
           <a:lstStyle/>
-          <a:p/>
+          <a:p>
+            <a:endParaRPr/>
+          </a:p>
         </p:txBody>
       </p:sp>
       <p:sp>
@@ -9498,7 +9438,7 @@
           <a:noFill/>
         </p:spPr>
         <p:txBody>
-          <a:bodyPr wrap="square" lIns="0" rIns="0" tIns="0" bIns="0" anchor="t">
+          <a:bodyPr wrap="square" lIns="0" tIns="0" rIns="0" bIns="0" anchor="t">
             <a:spAutoFit/>
           </a:bodyPr>
           <a:lstStyle/>
@@ -9532,7 +9472,7 @@
           <a:noFill/>
         </p:spPr>
         <p:txBody>
-          <a:bodyPr wrap="square" lIns="0" rIns="0" tIns="0" bIns="0" anchor="t">
+          <a:bodyPr wrap="square" lIns="0" tIns="0" rIns="0" bIns="0" anchor="t">
             <a:spAutoFit/>
           </a:bodyPr>
           <a:lstStyle/>
@@ -9591,7 +9531,9 @@
         <p:txBody>
           <a:bodyPr rtlCol="0" anchor="ctr"/>
           <a:lstStyle/>
-          <a:p/>
+          <a:p>
+            <a:endParaRPr/>
+          </a:p>
         </p:txBody>
       </p:sp>
       <p:sp>
@@ -9611,7 +9553,7 @@
           <a:noFill/>
         </p:spPr>
         <p:txBody>
-          <a:bodyPr wrap="square" lIns="0" rIns="0" tIns="0" bIns="0" anchor="t">
+          <a:bodyPr wrap="square" lIns="0" tIns="0" rIns="0" bIns="0" anchor="t">
             <a:spAutoFit/>
           </a:bodyPr>
           <a:lstStyle/>
@@ -9645,7 +9587,7 @@
           <a:noFill/>
         </p:spPr>
         <p:txBody>
-          <a:bodyPr wrap="square" lIns="0" rIns="0" tIns="0" bIns="0" anchor="t">
+          <a:bodyPr wrap="square" lIns="0" tIns="0" rIns="0" bIns="0" anchor="t">
             <a:spAutoFit/>
           </a:bodyPr>
           <a:lstStyle/>
@@ -9704,7 +9646,9 @@
         <p:txBody>
           <a:bodyPr rtlCol="0" anchor="ctr"/>
           <a:lstStyle/>
-          <a:p/>
+          <a:p>
+            <a:endParaRPr/>
+          </a:p>
         </p:txBody>
       </p:sp>
       <p:sp>
@@ -9724,7 +9668,7 @@
           <a:noFill/>
         </p:spPr>
         <p:txBody>
-          <a:bodyPr wrap="square" lIns="0" rIns="0" tIns="0" bIns="0" anchor="t">
+          <a:bodyPr wrap="square" lIns="0" tIns="0" rIns="0" bIns="0" anchor="t">
             <a:spAutoFit/>
           </a:bodyPr>
           <a:lstStyle/>
@@ -9758,7 +9702,7 @@
           <a:noFill/>
         </p:spPr>
         <p:txBody>
-          <a:bodyPr wrap="square" lIns="0" rIns="0" tIns="0" bIns="0" anchor="t">
+          <a:bodyPr wrap="square" lIns="0" tIns="0" rIns="0" bIns="0" anchor="t">
             <a:spAutoFit/>
           </a:bodyPr>
           <a:lstStyle/>
@@ -9817,7 +9761,9 @@
         <p:txBody>
           <a:bodyPr rtlCol="0" anchor="ctr"/>
           <a:lstStyle/>
-          <a:p/>
+          <a:p>
+            <a:endParaRPr/>
+          </a:p>
         </p:txBody>
       </p:sp>
       <p:sp>
@@ -9837,7 +9783,7 @@
           <a:noFill/>
         </p:spPr>
         <p:txBody>
-          <a:bodyPr wrap="square" lIns="0" rIns="0" tIns="0" bIns="0" anchor="t">
+          <a:bodyPr wrap="square" lIns="0" tIns="0" rIns="0" bIns="0" anchor="t">
             <a:spAutoFit/>
           </a:bodyPr>
           <a:lstStyle/>
@@ -9871,7 +9817,7 @@
           <a:noFill/>
         </p:spPr>
         <p:txBody>
-          <a:bodyPr wrap="square" lIns="0" rIns="0" tIns="0" bIns="0" anchor="t">
+          <a:bodyPr wrap="square" lIns="0" tIns="0" rIns="0" bIns="0" anchor="t">
             <a:spAutoFit/>
           </a:bodyPr>
           <a:lstStyle/>
@@ -9930,7 +9876,9 @@
         <p:txBody>
           <a:bodyPr rtlCol="0" anchor="ctr"/>
           <a:lstStyle/>
-          <a:p/>
+          <a:p>
+            <a:endParaRPr/>
+          </a:p>
         </p:txBody>
       </p:sp>
       <p:pic>
@@ -9942,7 +9890,7 @@
           <p:nvPr/>
         </p:nvPicPr>
         <p:blipFill>
-          <a:blip r:embed="rId2"/>
+          <a:blip r:embed="rId3"/>
           <a:stretch>
             <a:fillRect/>
           </a:stretch>
@@ -9974,7 +9922,7 @@
           <a:noFill/>
         </p:spPr>
         <p:txBody>
-          <a:bodyPr wrap="square" lIns="0" rIns="0" tIns="0" bIns="0" anchor="ctr">
+          <a:bodyPr wrap="square" lIns="0" tIns="0" rIns="0" bIns="0" anchor="ctr">
             <a:spAutoFit/>
           </a:bodyPr>
           <a:lstStyle/>
@@ -10007,7 +9955,7 @@
           <a:noFill/>
         </p:spPr>
         <p:txBody>
-          <a:bodyPr wrap="square" lIns="0" rIns="0" tIns="0" bIns="0" anchor="t">
+          <a:bodyPr wrap="square" lIns="0" tIns="0" rIns="0" bIns="0" anchor="t">
             <a:spAutoFit/>
           </a:bodyPr>
           <a:lstStyle/>
@@ -10160,7 +10108,9 @@
         <p:txBody>
           <a:bodyPr rtlCol="0" anchor="ctr"/>
           <a:lstStyle/>
-          <a:p/>
+          <a:p>
+            <a:endParaRPr/>
+          </a:p>
         </p:txBody>
       </p:sp>
       <p:pic>
@@ -10172,7 +10122,7 @@
           <p:nvPr/>
         </p:nvPicPr>
         <p:blipFill>
-          <a:blip r:embed="rId3"/>
+          <a:blip r:embed="rId4"/>
           <a:stretch>
             <a:fillRect/>
           </a:stretch>
@@ -10204,7 +10154,7 @@
           <a:noFill/>
         </p:spPr>
         <p:txBody>
-          <a:bodyPr wrap="square" lIns="0" rIns="0" tIns="0" bIns="0" anchor="ctr">
+          <a:bodyPr wrap="square" lIns="0" tIns="0" rIns="0" bIns="0" anchor="ctr">
             <a:spAutoFit/>
           </a:bodyPr>
           <a:lstStyle/>
@@ -10237,7 +10187,7 @@
           <a:noFill/>
         </p:spPr>
         <p:txBody>
-          <a:bodyPr wrap="square" lIns="0" rIns="0" tIns="0" bIns="0" anchor="t">
+          <a:bodyPr wrap="square" lIns="0" tIns="0" rIns="0" bIns="0" anchor="t">
             <a:spAutoFit/>
           </a:bodyPr>
           <a:lstStyle/>
@@ -10401,7 +10351,9 @@
         <p:txBody>
           <a:bodyPr rtlCol="0" anchor="ctr"/>
           <a:lstStyle/>
-          <a:p/>
+          <a:p>
+            <a:endParaRPr/>
+          </a:p>
         </p:txBody>
       </p:sp>
       <p:pic>
@@ -10413,7 +10365,7 @@
           <p:nvPr/>
         </p:nvPicPr>
         <p:blipFill>
-          <a:blip r:embed="rId4"/>
+          <a:blip r:embed="rId5"/>
           <a:stretch>
             <a:fillRect/>
           </a:stretch>
@@ -10445,7 +10397,7 @@
           <a:noFill/>
         </p:spPr>
         <p:txBody>
-          <a:bodyPr wrap="square" lIns="0" rIns="0" tIns="0" bIns="0" anchor="ctr">
+          <a:bodyPr wrap="square" lIns="0" tIns="0" rIns="0" bIns="0" anchor="ctr">
             <a:spAutoFit/>
           </a:bodyPr>
           <a:lstStyle/>
@@ -10478,7 +10430,7 @@
           <a:noFill/>
         </p:spPr>
         <p:txBody>
-          <a:bodyPr wrap="square" lIns="0" rIns="0" tIns="0" bIns="0" anchor="t">
+          <a:bodyPr wrap="square" lIns="0" tIns="0" rIns="0" bIns="0" anchor="t">
             <a:spAutoFit/>
           </a:bodyPr>
           <a:lstStyle/>
@@ -10877,4 +10829,319 @@
     </a:ext>
   </a:extLst>
 </a:theme>
+</file>
+
+<file path=ppt/theme/theme2.xml><?xml version="1.0" encoding="utf-8"?>
+<a:theme xmlns:a="http://schemas.openxmlformats.org/drawingml/2006/main" name="Office Theme">
+  <a:themeElements>
+    <a:clrScheme name="Office">
+      <a:dk1>
+        <a:sysClr val="windowText" lastClr="000000"/>
+      </a:dk1>
+      <a:lt1>
+        <a:sysClr val="window" lastClr="FFFFFF"/>
+      </a:lt1>
+      <a:dk2>
+        <a:srgbClr val="0E2841"/>
+      </a:dk2>
+      <a:lt2>
+        <a:srgbClr val="E8E8E8"/>
+      </a:lt2>
+      <a:accent1>
+        <a:srgbClr val="156082"/>
+      </a:accent1>
+      <a:accent2>
+        <a:srgbClr val="E97132"/>
+      </a:accent2>
+      <a:accent3>
+        <a:srgbClr val="196B24"/>
+      </a:accent3>
+      <a:accent4>
+        <a:srgbClr val="0F9ED5"/>
+      </a:accent4>
+      <a:accent5>
+        <a:srgbClr val="A02B93"/>
+      </a:accent5>
+      <a:accent6>
+        <a:srgbClr val="4EA72E"/>
+      </a:accent6>
+      <a:hlink>
+        <a:srgbClr val="467886"/>
+      </a:hlink>
+      <a:folHlink>
+        <a:srgbClr val="96607D"/>
+      </a:folHlink>
+    </a:clrScheme>
+    <a:fontScheme name="Office">
+      <a:majorFont>
+        <a:latin typeface="Aptos Display" panose="02110004020202020204"/>
+        <a:ea typeface=""/>
+        <a:cs typeface=""/>
+        <a:font script="Jpan" typeface="游ゴシック Light"/>
+        <a:font script="Hang" typeface="맑은 고딕"/>
+        <a:font script="Hans" typeface="等线 Light"/>
+        <a:font script="Hant" typeface="新細明體"/>
+        <a:font script="Arab" typeface="Times New Roman"/>
+        <a:font script="Hebr" typeface="Times New Roman"/>
+        <a:font script="Thai" typeface="Angsana New"/>
+        <a:font script="Ethi" typeface="Nyala"/>
+        <a:font script="Beng" typeface="Vrinda"/>
+        <a:font script="Gujr" typeface="Shruti"/>
+        <a:font script="Khmr" typeface="MoolBoran"/>
+        <a:font script="Knda" typeface="Tunga"/>
+        <a:font script="Guru" typeface="Raavi"/>
+        <a:font script="Cans" typeface="Euphemia"/>
+        <a:font script="Cher" typeface="Plantagenet Cherokee"/>
+        <a:font script="Yiii" typeface="Microsoft Yi Baiti"/>
+        <a:font script="Tibt" typeface="Microsoft Himalaya"/>
+        <a:font script="Thaa" typeface="MV Boli"/>
+        <a:font script="Deva" typeface="Mangal"/>
+        <a:font script="Telu" typeface="Gautami"/>
+        <a:font script="Taml" typeface="Latha"/>
+        <a:font script="Syrc" typeface="Estrangelo Edessa"/>
+        <a:font script="Orya" typeface="Kalinga"/>
+        <a:font script="Mlym" typeface="Kartika"/>
+        <a:font script="Laoo" typeface="DokChampa"/>
+        <a:font script="Sinh" typeface="Iskoola Pota"/>
+        <a:font script="Mong" typeface="Mongolian Baiti"/>
+        <a:font script="Viet" typeface="Times New Roman"/>
+        <a:font script="Uigh" typeface="Microsoft Uighur"/>
+        <a:font script="Geor" typeface="Sylfaen"/>
+        <a:font script="Armn" typeface="Arial"/>
+        <a:font script="Bugi" typeface="Leelawadee UI"/>
+        <a:font script="Bopo" typeface="Microsoft JhengHei"/>
+        <a:font script="Java" typeface="Javanese Text"/>
+        <a:font script="Lisu" typeface="Segoe UI"/>
+        <a:font script="Mymr" typeface="Myanmar Text"/>
+        <a:font script="Nkoo" typeface="Ebrima"/>
+        <a:font script="Olck" typeface="Nirmala UI"/>
+        <a:font script="Osma" typeface="Ebrima"/>
+        <a:font script="Phag" typeface="Phagspa"/>
+        <a:font script="Syrn" typeface="Estrangelo Edessa"/>
+        <a:font script="Syrj" typeface="Estrangelo Edessa"/>
+        <a:font script="Syre" typeface="Estrangelo Edessa"/>
+        <a:font script="Sora" typeface="Nirmala UI"/>
+        <a:font script="Tale" typeface="Microsoft Tai Le"/>
+        <a:font script="Talu" typeface="Microsoft New Tai Lue"/>
+        <a:font script="Tfng" typeface="Ebrima"/>
+      </a:majorFont>
+      <a:minorFont>
+        <a:latin typeface="Aptos" panose="02110004020202020204"/>
+        <a:ea typeface=""/>
+        <a:cs typeface=""/>
+        <a:font script="Jpan" typeface="游ゴシック"/>
+        <a:font script="Hang" typeface="맑은 고딕"/>
+        <a:font script="Hans" typeface="等线"/>
+        <a:font script="Hant" typeface="新細明體"/>
+        <a:font script="Arab" typeface="Arial"/>
+        <a:font script="Hebr" typeface="Arial"/>
+        <a:font script="Thai" typeface="Cordia New"/>
+        <a:font script="Ethi" typeface="Nyala"/>
+        <a:font script="Beng" typeface="Vrinda"/>
+        <a:font script="Gujr" typeface="Shruti"/>
+        <a:font script="Khmr" typeface="DaunPenh"/>
+        <a:font script="Knda" typeface="Tunga"/>
+        <a:font script="Guru" typeface="Raavi"/>
+        <a:font script="Cans" typeface="Euphemia"/>
+        <a:font script="Cher" typeface="Plantagenet Cherokee"/>
+        <a:font script="Yiii" typeface="Microsoft Yi Baiti"/>
+        <a:font script="Tibt" typeface="Microsoft Himalaya"/>
+        <a:font script="Thaa" typeface="MV Boli"/>
+        <a:font script="Deva" typeface="Mangal"/>
+        <a:font script="Telu" typeface="Gautami"/>
+        <a:font script="Taml" typeface="Latha"/>
+        <a:font script="Syrc" typeface="Estrangelo Edessa"/>
+        <a:font script="Orya" typeface="Kalinga"/>
+        <a:font script="Mlym" typeface="Kartika"/>
+        <a:font script="Laoo" typeface="DokChampa"/>
+        <a:font script="Sinh" typeface="Iskoola Pota"/>
+        <a:font script="Mong" typeface="Mongolian Baiti"/>
+        <a:font script="Viet" typeface="Arial"/>
+        <a:font script="Uigh" typeface="Microsoft Uighur"/>
+        <a:font script="Geor" typeface="Sylfaen"/>
+        <a:font script="Armn" typeface="Arial"/>
+        <a:font script="Bugi" typeface="Leelawadee UI"/>
+        <a:font script="Bopo" typeface="Microsoft JhengHei"/>
+        <a:font script="Java" typeface="Javanese Text"/>
+        <a:font script="Lisu" typeface="Segoe UI"/>
+        <a:font script="Mymr" typeface="Myanmar Text"/>
+        <a:font script="Nkoo" typeface="Ebrima"/>
+        <a:font script="Olck" typeface="Nirmala UI"/>
+        <a:font script="Osma" typeface="Ebrima"/>
+        <a:font script="Phag" typeface="Phagspa"/>
+        <a:font script="Syrn" typeface="Estrangelo Edessa"/>
+        <a:font script="Syrj" typeface="Estrangelo Edessa"/>
+        <a:font script="Syre" typeface="Estrangelo Edessa"/>
+        <a:font script="Sora" typeface="Nirmala UI"/>
+        <a:font script="Tale" typeface="Microsoft Tai Le"/>
+        <a:font script="Talu" typeface="Microsoft New Tai Lue"/>
+        <a:font script="Tfng" typeface="Ebrima"/>
+      </a:minorFont>
+    </a:fontScheme>
+    <a:fmtScheme name="Office">
+      <a:fillStyleLst>
+        <a:solidFill>
+          <a:schemeClr val="phClr"/>
+        </a:solidFill>
+        <a:gradFill rotWithShape="1">
+          <a:gsLst>
+            <a:gs pos="0">
+              <a:schemeClr val="phClr">
+                <a:lumMod val="110000"/>
+                <a:satMod val="105000"/>
+                <a:tint val="67000"/>
+              </a:schemeClr>
+            </a:gs>
+            <a:gs pos="50000">
+              <a:schemeClr val="phClr">
+                <a:lumMod val="105000"/>
+                <a:satMod val="103000"/>
+                <a:tint val="73000"/>
+              </a:schemeClr>
+            </a:gs>
+            <a:gs pos="100000">
+              <a:schemeClr val="phClr">
+                <a:lumMod val="105000"/>
+                <a:satMod val="109000"/>
+                <a:tint val="81000"/>
+              </a:schemeClr>
+            </a:gs>
+          </a:gsLst>
+          <a:lin ang="5400000" scaled="0"/>
+        </a:gradFill>
+        <a:gradFill rotWithShape="1">
+          <a:gsLst>
+            <a:gs pos="0">
+              <a:schemeClr val="phClr">
+                <a:satMod val="103000"/>
+                <a:lumMod val="102000"/>
+                <a:tint val="94000"/>
+              </a:schemeClr>
+            </a:gs>
+            <a:gs pos="50000">
+              <a:schemeClr val="phClr">
+                <a:satMod val="110000"/>
+                <a:lumMod val="100000"/>
+                <a:shade val="100000"/>
+              </a:schemeClr>
+            </a:gs>
+            <a:gs pos="100000">
+              <a:schemeClr val="phClr">
+                <a:lumMod val="99000"/>
+                <a:satMod val="120000"/>
+                <a:shade val="78000"/>
+              </a:schemeClr>
+            </a:gs>
+          </a:gsLst>
+          <a:lin ang="5400000" scaled="0"/>
+        </a:gradFill>
+      </a:fillStyleLst>
+      <a:lnStyleLst>
+        <a:ln w="12700" cap="flat" cmpd="sng" algn="ctr">
+          <a:solidFill>
+            <a:schemeClr val="phClr"/>
+          </a:solidFill>
+          <a:prstDash val="solid"/>
+          <a:miter lim="800000"/>
+        </a:ln>
+        <a:ln w="19050" cap="flat" cmpd="sng" algn="ctr">
+          <a:solidFill>
+            <a:schemeClr val="phClr"/>
+          </a:solidFill>
+          <a:prstDash val="solid"/>
+          <a:miter lim="800000"/>
+        </a:ln>
+        <a:ln w="25400" cap="flat" cmpd="sng" algn="ctr">
+          <a:solidFill>
+            <a:schemeClr val="phClr"/>
+          </a:solidFill>
+          <a:prstDash val="solid"/>
+          <a:miter lim="800000"/>
+        </a:ln>
+      </a:lnStyleLst>
+      <a:effectStyleLst>
+        <a:effectStyle>
+          <a:effectLst/>
+        </a:effectStyle>
+        <a:effectStyle>
+          <a:effectLst/>
+        </a:effectStyle>
+        <a:effectStyle>
+          <a:effectLst>
+            <a:outerShdw blurRad="57150" dist="19050" dir="5400000" algn="ctr" rotWithShape="0">
+              <a:srgbClr val="000000">
+                <a:alpha val="63000"/>
+              </a:srgbClr>
+            </a:outerShdw>
+          </a:effectLst>
+        </a:effectStyle>
+      </a:effectStyleLst>
+      <a:bgFillStyleLst>
+        <a:solidFill>
+          <a:schemeClr val="phClr"/>
+        </a:solidFill>
+        <a:solidFill>
+          <a:schemeClr val="phClr">
+            <a:tint val="95000"/>
+            <a:satMod val="170000"/>
+          </a:schemeClr>
+        </a:solidFill>
+        <a:gradFill rotWithShape="1">
+          <a:gsLst>
+            <a:gs pos="0">
+              <a:schemeClr val="phClr">
+                <a:tint val="93000"/>
+                <a:satMod val="150000"/>
+                <a:shade val="98000"/>
+                <a:lumMod val="102000"/>
+              </a:schemeClr>
+            </a:gs>
+            <a:gs pos="50000">
+              <a:schemeClr val="phClr">
+                <a:tint val="98000"/>
+                <a:satMod val="130000"/>
+                <a:shade val="90000"/>
+                <a:lumMod val="103000"/>
+              </a:schemeClr>
+            </a:gs>
+            <a:gs pos="100000">
+              <a:schemeClr val="phClr">
+                <a:shade val="63000"/>
+                <a:satMod val="120000"/>
+              </a:schemeClr>
+            </a:gs>
+          </a:gsLst>
+          <a:lin ang="5400000" scaled="0"/>
+        </a:gradFill>
+      </a:bgFillStyleLst>
+    </a:fmtScheme>
+  </a:themeElements>
+  <a:objectDefaults>
+    <a:lnDef>
+      <a:spPr/>
+      <a:bodyPr/>
+      <a:lstStyle/>
+      <a:style>
+        <a:lnRef idx="2">
+          <a:schemeClr val="accent1"/>
+        </a:lnRef>
+        <a:fillRef idx="0">
+          <a:schemeClr val="accent1"/>
+        </a:fillRef>
+        <a:effectRef idx="1">
+          <a:schemeClr val="accent1"/>
+        </a:effectRef>
+        <a:fontRef idx="minor">
+          <a:schemeClr val="tx1"/>
+        </a:fontRef>
+      </a:style>
+    </a:lnDef>
+  </a:objectDefaults>
+  <a:extraClrSchemeLst/>
+  <a:extLst>
+    <a:ext uri="{05A4C25C-085E-4340-85A3-A5531E510DB2}">
+      <thm15:themeFamily xmlns:thm15="http://schemas.microsoft.com/office/thememl/2012/main" name="Office Theme" id="{2E142A2C-CD16-42D6-873A-C26D2A0506FA}" vid="{1BDDFF52-6CD6-40A5-AB3C-68EB2F1E4D0A}"/>
+    </a:ext>
+  </a:extLst>
+</a:theme>
 </file>